--- a/Lesson1/Godot入门实践蛙里奥教程内容.pptx
+++ b/Lesson1/Godot入门实践蛙里奥教程内容.pptx
@@ -333,7 +333,7 @@
           <a:p>
             <a:fld id="{9B9F07B0-025E-4E92-AC39-0EAAEC335187}" type="datetimeFigureOut">
               <a:rPr lang="zh-CN" altLang="en-US" smtClean="0"/>
-              <a:t>2026/4/30</a:t>
+              <a:t>2026/5/2</a:t>
             </a:fld>
             <a:endParaRPr lang="zh-CN" altLang="en-US"/>
           </a:p>
@@ -624,7 +624,7 @@
           <a:p>
             <a:fld id="{9B9F07B0-025E-4E92-AC39-0EAAEC335187}" type="datetimeFigureOut">
               <a:rPr lang="zh-CN" altLang="en-US" smtClean="0"/>
-              <a:t>2026/4/30</a:t>
+              <a:t>2026/5/2</a:t>
             </a:fld>
             <a:endParaRPr lang="zh-CN" altLang="en-US"/>
           </a:p>
@@ -883,7 +883,7 @@
           <a:p>
             <a:fld id="{9B9F07B0-025E-4E92-AC39-0EAAEC335187}" type="datetimeFigureOut">
               <a:rPr lang="zh-CN" altLang="en-US" smtClean="0"/>
-              <a:t>2026/4/30</a:t>
+              <a:t>2026/5/2</a:t>
             </a:fld>
             <a:endParaRPr lang="zh-CN" altLang="en-US"/>
           </a:p>
@@ -1352,7 +1352,7 @@
           <a:p>
             <a:fld id="{9B9F07B0-025E-4E92-AC39-0EAAEC335187}" type="datetimeFigureOut">
               <a:rPr lang="zh-CN" altLang="en-US" smtClean="0"/>
-              <a:t>2026/4/30</a:t>
+              <a:t>2026/5/2</a:t>
             </a:fld>
             <a:endParaRPr lang="zh-CN" altLang="en-US"/>
           </a:p>
@@ -1532,7 +1532,7 @@
           <a:p>
             <a:fld id="{9B9F07B0-025E-4E92-AC39-0EAAEC335187}" type="datetimeFigureOut">
               <a:rPr lang="zh-CN" altLang="en-US" smtClean="0"/>
-              <a:t>2026/4/30</a:t>
+              <a:t>2026/5/2</a:t>
             </a:fld>
             <a:endParaRPr lang="zh-CN" altLang="en-US"/>
           </a:p>
@@ -2108,7 +2108,7 @@
           <a:p>
             <a:fld id="{9B9F07B0-025E-4E92-AC39-0EAAEC335187}" type="datetimeFigureOut">
               <a:rPr lang="zh-CN" altLang="en-US" smtClean="0"/>
-              <a:t>2026/4/30</a:t>
+              <a:t>2026/5/2</a:t>
             </a:fld>
             <a:endParaRPr lang="zh-CN" altLang="en-US"/>
           </a:p>
@@ -2440,7 +2440,7 @@
           <a:p>
             <a:fld id="{9B9F07B0-025E-4E92-AC39-0EAAEC335187}" type="datetimeFigureOut">
               <a:rPr lang="zh-CN" altLang="en-US" smtClean="0"/>
-              <a:t>2026/4/30</a:t>
+              <a:t>2026/5/2</a:t>
             </a:fld>
             <a:endParaRPr lang="zh-CN" altLang="en-US"/>
           </a:p>
@@ -2615,7 +2615,7 @@
           <a:p>
             <a:fld id="{9B9F07B0-025E-4E92-AC39-0EAAEC335187}" type="datetimeFigureOut">
               <a:rPr lang="zh-CN" altLang="en-US" smtClean="0"/>
-              <a:t>2026/4/30</a:t>
+              <a:t>2026/5/2</a:t>
             </a:fld>
             <a:endParaRPr lang="zh-CN" altLang="en-US"/>
           </a:p>
@@ -2795,7 +2795,7 @@
           <a:p>
             <a:fld id="{9B9F07B0-025E-4E92-AC39-0EAAEC335187}" type="datetimeFigureOut">
               <a:rPr lang="zh-CN" altLang="en-US" smtClean="0"/>
-              <a:t>2026/4/30</a:t>
+              <a:t>2026/5/2</a:t>
             </a:fld>
             <a:endParaRPr lang="zh-CN" altLang="en-US"/>
           </a:p>
@@ -2965,7 +2965,7 @@
           <a:p>
             <a:fld id="{9B9F07B0-025E-4E92-AC39-0EAAEC335187}" type="datetimeFigureOut">
               <a:rPr lang="zh-CN" altLang="en-US" smtClean="0"/>
-              <a:t>2026/4/30</a:t>
+              <a:t>2026/5/2</a:t>
             </a:fld>
             <a:endParaRPr lang="zh-CN" altLang="en-US"/>
           </a:p>
@@ -3222,7 +3222,7 @@
           <a:p>
             <a:fld id="{9B9F07B0-025E-4E92-AC39-0EAAEC335187}" type="datetimeFigureOut">
               <a:rPr lang="zh-CN" altLang="en-US" smtClean="0"/>
-              <a:t>2026/4/30</a:t>
+              <a:t>2026/5/2</a:t>
             </a:fld>
             <a:endParaRPr lang="zh-CN" altLang="en-US"/>
           </a:p>
@@ -3514,7 +3514,7 @@
           <a:p>
             <a:fld id="{9B9F07B0-025E-4E92-AC39-0EAAEC335187}" type="datetimeFigureOut">
               <a:rPr lang="zh-CN" altLang="en-US" smtClean="0"/>
-              <a:t>2026/4/30</a:t>
+              <a:t>2026/5/2</a:t>
             </a:fld>
             <a:endParaRPr lang="zh-CN" altLang="en-US"/>
           </a:p>
@@ -3944,7 +3944,7 @@
           <a:p>
             <a:fld id="{9B9F07B0-025E-4E92-AC39-0EAAEC335187}" type="datetimeFigureOut">
               <a:rPr lang="zh-CN" altLang="en-US" smtClean="0"/>
-              <a:t>2026/4/30</a:t>
+              <a:t>2026/5/2</a:t>
             </a:fld>
             <a:endParaRPr lang="zh-CN" altLang="en-US"/>
           </a:p>
@@ -4062,7 +4062,7 @@
           <a:p>
             <a:fld id="{9B9F07B0-025E-4E92-AC39-0EAAEC335187}" type="datetimeFigureOut">
               <a:rPr lang="zh-CN" altLang="en-US" smtClean="0"/>
-              <a:t>2026/4/30</a:t>
+              <a:t>2026/5/2</a:t>
             </a:fld>
             <a:endParaRPr lang="zh-CN" altLang="en-US"/>
           </a:p>
@@ -4157,7 +4157,7 @@
           <a:p>
             <a:fld id="{9B9F07B0-025E-4E92-AC39-0EAAEC335187}" type="datetimeFigureOut">
               <a:rPr lang="zh-CN" altLang="en-US" smtClean="0"/>
-              <a:t>2026/4/30</a:t>
+              <a:t>2026/5/2</a:t>
             </a:fld>
             <a:endParaRPr lang="zh-CN" altLang="en-US"/>
           </a:p>
@@ -4440,7 +4440,7 @@
           <a:p>
             <a:fld id="{9B9F07B0-025E-4E92-AC39-0EAAEC335187}" type="datetimeFigureOut">
               <a:rPr lang="zh-CN" altLang="en-US" smtClean="0"/>
-              <a:t>2026/4/30</a:t>
+              <a:t>2026/5/2</a:t>
             </a:fld>
             <a:endParaRPr lang="zh-CN" altLang="en-US"/>
           </a:p>
@@ -4731,7 +4731,7 @@
           <a:p>
             <a:fld id="{9B9F07B0-025E-4E92-AC39-0EAAEC335187}" type="datetimeFigureOut">
               <a:rPr lang="zh-CN" altLang="en-US" smtClean="0"/>
-              <a:t>2026/4/30</a:t>
+              <a:t>2026/5/2</a:t>
             </a:fld>
             <a:endParaRPr lang="zh-CN" altLang="en-US"/>
           </a:p>
@@ -4962,7 +4962,7 @@
           <a:p>
             <a:fld id="{9B9F07B0-025E-4E92-AC39-0EAAEC335187}" type="datetimeFigureOut">
               <a:rPr lang="zh-CN" altLang="en-US" smtClean="0"/>
-              <a:t>2026/4/30</a:t>
+              <a:t>2026/5/2</a:t>
             </a:fld>
             <a:endParaRPr lang="zh-CN" altLang="en-US"/>
           </a:p>
@@ -7224,7 +7224,7 @@
                 <a:latin typeface="思源黑体 CN Heavy" panose="020B0A00000000000000" pitchFamily="34" charset="-122"/>
                 <a:ea typeface="思源黑体 CN Heavy" panose="020B0A00000000000000" pitchFamily="34" charset="-122"/>
               </a:rPr>
-              <a:t>熟悉坐标系</a:t>
+              <a:t>熟悉坐标系、项目中纹理渲染模式</a:t>
             </a:r>
             <a:endParaRPr lang="en-US" altLang="zh-CN" sz="2800" dirty="0">
               <a:solidFill>
@@ -7252,7 +7252,7 @@
                 <a:latin typeface="思源黑体 CN Heavy" panose="020B0A00000000000000" pitchFamily="34" charset="-122"/>
                 <a:ea typeface="思源黑体 CN Heavy" panose="020B0A00000000000000" pitchFamily="34" charset="-122"/>
               </a:rPr>
-              <a:t>开始场景主元素的布置：背景、按钮、音乐、音效</a:t>
+              <a:t>开始场景主元素的布置：背景、按钮、动画元素</a:t>
             </a:r>
             <a:endParaRPr lang="en-US" altLang="zh-CN" sz="2800" dirty="0">
               <a:solidFill>

--- a/Lesson1/Godot入门实践蛙里奥教程内容.pptx
+++ b/Lesson1/Godot入门实践蛙里奥教程内容.pptx
@@ -14,6 +14,8 @@
     <p:sldId id="261" r:id="rId8"/>
     <p:sldId id="263" r:id="rId9"/>
     <p:sldId id="264" r:id="rId10"/>
+    <p:sldId id="265" r:id="rId11"/>
+    <p:sldId id="266" r:id="rId12"/>
   </p:sldIdLst>
   <p:sldSz cx="12192000" cy="6858000"/>
   <p:notesSz cx="6858000" cy="9144000"/>
@@ -333,7 +335,7 @@
           <a:p>
             <a:fld id="{9B9F07B0-025E-4E92-AC39-0EAAEC335187}" type="datetimeFigureOut">
               <a:rPr lang="zh-CN" altLang="en-US" smtClean="0"/>
-              <a:t>2026/5/2</a:t>
+              <a:t>2026/5/4</a:t>
             </a:fld>
             <a:endParaRPr lang="zh-CN" altLang="en-US"/>
           </a:p>
@@ -624,7 +626,7 @@
           <a:p>
             <a:fld id="{9B9F07B0-025E-4E92-AC39-0EAAEC335187}" type="datetimeFigureOut">
               <a:rPr lang="zh-CN" altLang="en-US" smtClean="0"/>
-              <a:t>2026/5/2</a:t>
+              <a:t>2026/5/4</a:t>
             </a:fld>
             <a:endParaRPr lang="zh-CN" altLang="en-US"/>
           </a:p>
@@ -883,7 +885,7 @@
           <a:p>
             <a:fld id="{9B9F07B0-025E-4E92-AC39-0EAAEC335187}" type="datetimeFigureOut">
               <a:rPr lang="zh-CN" altLang="en-US" smtClean="0"/>
-              <a:t>2026/5/2</a:t>
+              <a:t>2026/5/4</a:t>
             </a:fld>
             <a:endParaRPr lang="zh-CN" altLang="en-US"/>
           </a:p>
@@ -1352,7 +1354,7 @@
           <a:p>
             <a:fld id="{9B9F07B0-025E-4E92-AC39-0EAAEC335187}" type="datetimeFigureOut">
               <a:rPr lang="zh-CN" altLang="en-US" smtClean="0"/>
-              <a:t>2026/5/2</a:t>
+              <a:t>2026/5/4</a:t>
             </a:fld>
             <a:endParaRPr lang="zh-CN" altLang="en-US"/>
           </a:p>
@@ -1532,7 +1534,7 @@
           <a:p>
             <a:fld id="{9B9F07B0-025E-4E92-AC39-0EAAEC335187}" type="datetimeFigureOut">
               <a:rPr lang="zh-CN" altLang="en-US" smtClean="0"/>
-              <a:t>2026/5/2</a:t>
+              <a:t>2026/5/4</a:t>
             </a:fld>
             <a:endParaRPr lang="zh-CN" altLang="en-US"/>
           </a:p>
@@ -2108,7 +2110,7 @@
           <a:p>
             <a:fld id="{9B9F07B0-025E-4E92-AC39-0EAAEC335187}" type="datetimeFigureOut">
               <a:rPr lang="zh-CN" altLang="en-US" smtClean="0"/>
-              <a:t>2026/5/2</a:t>
+              <a:t>2026/5/4</a:t>
             </a:fld>
             <a:endParaRPr lang="zh-CN" altLang="en-US"/>
           </a:p>
@@ -2440,7 +2442,7 @@
           <a:p>
             <a:fld id="{9B9F07B0-025E-4E92-AC39-0EAAEC335187}" type="datetimeFigureOut">
               <a:rPr lang="zh-CN" altLang="en-US" smtClean="0"/>
-              <a:t>2026/5/2</a:t>
+              <a:t>2026/5/4</a:t>
             </a:fld>
             <a:endParaRPr lang="zh-CN" altLang="en-US"/>
           </a:p>
@@ -2615,7 +2617,7 @@
           <a:p>
             <a:fld id="{9B9F07B0-025E-4E92-AC39-0EAAEC335187}" type="datetimeFigureOut">
               <a:rPr lang="zh-CN" altLang="en-US" smtClean="0"/>
-              <a:t>2026/5/2</a:t>
+              <a:t>2026/5/4</a:t>
             </a:fld>
             <a:endParaRPr lang="zh-CN" altLang="en-US"/>
           </a:p>
@@ -2795,7 +2797,7 @@
           <a:p>
             <a:fld id="{9B9F07B0-025E-4E92-AC39-0EAAEC335187}" type="datetimeFigureOut">
               <a:rPr lang="zh-CN" altLang="en-US" smtClean="0"/>
-              <a:t>2026/5/2</a:t>
+              <a:t>2026/5/4</a:t>
             </a:fld>
             <a:endParaRPr lang="zh-CN" altLang="en-US"/>
           </a:p>
@@ -2965,7 +2967,7 @@
           <a:p>
             <a:fld id="{9B9F07B0-025E-4E92-AC39-0EAAEC335187}" type="datetimeFigureOut">
               <a:rPr lang="zh-CN" altLang="en-US" smtClean="0"/>
-              <a:t>2026/5/2</a:t>
+              <a:t>2026/5/4</a:t>
             </a:fld>
             <a:endParaRPr lang="zh-CN" altLang="en-US"/>
           </a:p>
@@ -3222,7 +3224,7 @@
           <a:p>
             <a:fld id="{9B9F07B0-025E-4E92-AC39-0EAAEC335187}" type="datetimeFigureOut">
               <a:rPr lang="zh-CN" altLang="en-US" smtClean="0"/>
-              <a:t>2026/5/2</a:t>
+              <a:t>2026/5/4</a:t>
             </a:fld>
             <a:endParaRPr lang="zh-CN" altLang="en-US"/>
           </a:p>
@@ -3514,7 +3516,7 @@
           <a:p>
             <a:fld id="{9B9F07B0-025E-4E92-AC39-0EAAEC335187}" type="datetimeFigureOut">
               <a:rPr lang="zh-CN" altLang="en-US" smtClean="0"/>
-              <a:t>2026/5/2</a:t>
+              <a:t>2026/5/4</a:t>
             </a:fld>
             <a:endParaRPr lang="zh-CN" altLang="en-US"/>
           </a:p>
@@ -3944,7 +3946,7 @@
           <a:p>
             <a:fld id="{9B9F07B0-025E-4E92-AC39-0EAAEC335187}" type="datetimeFigureOut">
               <a:rPr lang="zh-CN" altLang="en-US" smtClean="0"/>
-              <a:t>2026/5/2</a:t>
+              <a:t>2026/5/4</a:t>
             </a:fld>
             <a:endParaRPr lang="zh-CN" altLang="en-US"/>
           </a:p>
@@ -4062,7 +4064,7 @@
           <a:p>
             <a:fld id="{9B9F07B0-025E-4E92-AC39-0EAAEC335187}" type="datetimeFigureOut">
               <a:rPr lang="zh-CN" altLang="en-US" smtClean="0"/>
-              <a:t>2026/5/2</a:t>
+              <a:t>2026/5/4</a:t>
             </a:fld>
             <a:endParaRPr lang="zh-CN" altLang="en-US"/>
           </a:p>
@@ -4157,7 +4159,7 @@
           <a:p>
             <a:fld id="{9B9F07B0-025E-4E92-AC39-0EAAEC335187}" type="datetimeFigureOut">
               <a:rPr lang="zh-CN" altLang="en-US" smtClean="0"/>
-              <a:t>2026/5/2</a:t>
+              <a:t>2026/5/4</a:t>
             </a:fld>
             <a:endParaRPr lang="zh-CN" altLang="en-US"/>
           </a:p>
@@ -4440,7 +4442,7 @@
           <a:p>
             <a:fld id="{9B9F07B0-025E-4E92-AC39-0EAAEC335187}" type="datetimeFigureOut">
               <a:rPr lang="zh-CN" altLang="en-US" smtClean="0"/>
-              <a:t>2026/5/2</a:t>
+              <a:t>2026/5/4</a:t>
             </a:fld>
             <a:endParaRPr lang="zh-CN" altLang="en-US"/>
           </a:p>
@@ -4731,7 +4733,7 @@
           <a:p>
             <a:fld id="{9B9F07B0-025E-4E92-AC39-0EAAEC335187}" type="datetimeFigureOut">
               <a:rPr lang="zh-CN" altLang="en-US" smtClean="0"/>
-              <a:t>2026/5/2</a:t>
+              <a:t>2026/5/4</a:t>
             </a:fld>
             <a:endParaRPr lang="zh-CN" altLang="en-US"/>
           </a:p>
@@ -4962,7 +4964,7 @@
           <a:p>
             <a:fld id="{9B9F07B0-025E-4E92-AC39-0EAAEC335187}" type="datetimeFigureOut">
               <a:rPr lang="zh-CN" altLang="en-US" smtClean="0"/>
-              <a:t>2026/5/2</a:t>
+              <a:t>2026/5/4</a:t>
             </a:fld>
             <a:endParaRPr lang="zh-CN" altLang="en-US"/>
           </a:p>
@@ -5908,6 +5910,522 @@
 </p:sld>
 </file>
 
+<file path=ppt/slides/slide10.xml><?xml version="1.0" encoding="utf-8"?>
+<p:sld xmlns:a="http://schemas.openxmlformats.org/drawingml/2006/main" xmlns:r="http://schemas.openxmlformats.org/officeDocument/2006/relationships" xmlns:p="http://schemas.openxmlformats.org/presentationml/2006/main">
+  <p:cSld>
+    <p:spTree>
+      <p:nvGrpSpPr>
+        <p:cNvPr id="1" name=""/>
+        <p:cNvGrpSpPr/>
+        <p:nvPr/>
+      </p:nvGrpSpPr>
+      <p:grpSpPr>
+        <a:xfrm>
+          <a:off x="0" y="0"/>
+          <a:ext cx="0" cy="0"/>
+          <a:chOff x="0" y="0"/>
+          <a:chExt cx="0" cy="0"/>
+        </a:xfrm>
+      </p:grpSpPr>
+      <p:sp>
+        <p:nvSpPr>
+          <p:cNvPr id="2" name="文本框 1">
+            <a:extLst>
+              <a:ext uri="{FF2B5EF4-FFF2-40B4-BE49-F238E27FC236}">
+                <a16:creationId xmlns:a16="http://schemas.microsoft.com/office/drawing/2014/main" id="{A21C86B8-DA19-02EB-A308-CDA3C27C60E1}"/>
+              </a:ext>
+            </a:extLst>
+          </p:cNvPr>
+          <p:cNvSpPr txBox="1"/>
+          <p:nvPr/>
+        </p:nvSpPr>
+        <p:spPr>
+          <a:xfrm>
+            <a:off x="912600" y="897058"/>
+            <a:ext cx="8240278" cy="584775"/>
+          </a:xfrm>
+          <a:prstGeom prst="rect">
+            <a:avLst/>
+          </a:prstGeom>
+          <a:noFill/>
+        </p:spPr>
+        <p:txBody>
+          <a:bodyPr wrap="square" rtlCol="0">
+            <a:spAutoFit/>
+          </a:bodyPr>
+          <a:lstStyle/>
+          <a:p>
+            <a:r>
+              <a:rPr lang="en-US" altLang="zh-CN" sz="3200" dirty="0">
+                <a:solidFill>
+                  <a:srgbClr val="92D050"/>
+                </a:solidFill>
+                <a:latin typeface="思源黑体 CN Heavy" panose="020B0A00000000000000" pitchFamily="34" charset="-122"/>
+                <a:ea typeface="思源黑体 CN Heavy" panose="020B0A00000000000000" pitchFamily="34" charset="-122"/>
+              </a:rPr>
+              <a:t>04</a:t>
+            </a:r>
+            <a:r>
+              <a:rPr lang="zh-CN" altLang="en-US" sz="3200" dirty="0">
+                <a:solidFill>
+                  <a:srgbClr val="92D050"/>
+                </a:solidFill>
+                <a:latin typeface="思源黑体 CN Heavy" panose="020B0A00000000000000" pitchFamily="34" charset="-122"/>
+                <a:ea typeface="思源黑体 CN Heavy" panose="020B0A00000000000000" pitchFamily="34" charset="-122"/>
+              </a:rPr>
+              <a:t>、设置面板布局</a:t>
+            </a:r>
+          </a:p>
+        </p:txBody>
+      </p:sp>
+      <p:sp>
+        <p:nvSpPr>
+          <p:cNvPr id="3" name="文本框 2">
+            <a:extLst>
+              <a:ext uri="{FF2B5EF4-FFF2-40B4-BE49-F238E27FC236}">
+                <a16:creationId xmlns:a16="http://schemas.microsoft.com/office/drawing/2014/main" id="{7E37C123-3B14-9D57-7B59-167FE31C4419}"/>
+              </a:ext>
+            </a:extLst>
+          </p:cNvPr>
+          <p:cNvSpPr txBox="1"/>
+          <p:nvPr/>
+        </p:nvSpPr>
+        <p:spPr>
+          <a:xfrm>
+            <a:off x="912600" y="2123657"/>
+            <a:ext cx="10956846" cy="3970318"/>
+          </a:xfrm>
+          <a:prstGeom prst="rect">
+            <a:avLst/>
+          </a:prstGeom>
+          <a:noFill/>
+        </p:spPr>
+        <p:txBody>
+          <a:bodyPr wrap="square" rtlCol="0">
+            <a:spAutoFit/>
+          </a:bodyPr>
+          <a:lstStyle/>
+          <a:p>
+            <a:r>
+              <a:rPr lang="zh-CN" altLang="en-US" sz="2800" dirty="0">
+                <a:solidFill>
+                  <a:srgbClr val="FFC000"/>
+                </a:solidFill>
+                <a:latin typeface="思源黑体 CN Heavy" panose="020B0A00000000000000" pitchFamily="34" charset="-122"/>
+                <a:ea typeface="思源黑体 CN Heavy" panose="020B0A00000000000000" pitchFamily="34" charset="-122"/>
+              </a:rPr>
+              <a:t>全局自动化加载使用</a:t>
+            </a:r>
+            <a:endParaRPr lang="en-US" altLang="zh-CN" sz="2800" dirty="0">
+              <a:solidFill>
+                <a:srgbClr val="FFC000"/>
+              </a:solidFill>
+              <a:latin typeface="思源黑体 CN Heavy" panose="020B0A00000000000000" pitchFamily="34" charset="-122"/>
+              <a:ea typeface="思源黑体 CN Heavy" panose="020B0A00000000000000" pitchFamily="34" charset="-122"/>
+            </a:endParaRPr>
+          </a:p>
+          <a:p>
+            <a:endParaRPr lang="en-US" altLang="zh-CN" sz="2800" dirty="0">
+              <a:solidFill>
+                <a:srgbClr val="FFC000"/>
+              </a:solidFill>
+              <a:latin typeface="思源黑体 CN Heavy" panose="020B0A00000000000000" pitchFamily="34" charset="-122"/>
+              <a:ea typeface="思源黑体 CN Heavy" panose="020B0A00000000000000" pitchFamily="34" charset="-122"/>
+            </a:endParaRPr>
+          </a:p>
+          <a:p>
+            <a:r>
+              <a:rPr lang="zh-CN" altLang="en-US" sz="2800" dirty="0">
+                <a:solidFill>
+                  <a:srgbClr val="FFC000"/>
+                </a:solidFill>
+                <a:latin typeface="思源黑体 CN Heavy" panose="020B0A00000000000000" pitchFamily="34" charset="-122"/>
+                <a:ea typeface="思源黑体 CN Heavy" panose="020B0A00000000000000" pitchFamily="34" charset="-122"/>
+              </a:rPr>
+              <a:t>运行时节点视图：远程</a:t>
+            </a:r>
+            <a:endParaRPr lang="en-US" altLang="zh-CN" sz="2800" dirty="0">
+              <a:solidFill>
+                <a:srgbClr val="FFC000"/>
+              </a:solidFill>
+              <a:latin typeface="思源黑体 CN Heavy" panose="020B0A00000000000000" pitchFamily="34" charset="-122"/>
+              <a:ea typeface="思源黑体 CN Heavy" panose="020B0A00000000000000" pitchFamily="34" charset="-122"/>
+            </a:endParaRPr>
+          </a:p>
+          <a:p>
+            <a:endParaRPr lang="en-US" altLang="zh-CN" sz="2800" dirty="0">
+              <a:solidFill>
+                <a:srgbClr val="FFC000"/>
+              </a:solidFill>
+              <a:latin typeface="思源黑体 CN Heavy" panose="020B0A00000000000000" pitchFamily="34" charset="-122"/>
+              <a:ea typeface="思源黑体 CN Heavy" panose="020B0A00000000000000" pitchFamily="34" charset="-122"/>
+            </a:endParaRPr>
+          </a:p>
+          <a:p>
+            <a:r>
+              <a:rPr lang="en-US" altLang="zh-CN" sz="2800" dirty="0">
+                <a:solidFill>
+                  <a:srgbClr val="FFC000"/>
+                </a:solidFill>
+                <a:latin typeface="思源黑体 CN Heavy" panose="020B0A00000000000000" pitchFamily="34" charset="-122"/>
+                <a:ea typeface="思源黑体 CN Heavy" panose="020B0A00000000000000" pitchFamily="34" charset="-122"/>
+              </a:rPr>
+              <a:t>Layer</a:t>
+            </a:r>
+            <a:r>
+              <a:rPr lang="zh-CN" altLang="en-US" sz="2800" dirty="0">
+                <a:solidFill>
+                  <a:srgbClr val="FFC000"/>
+                </a:solidFill>
+                <a:latin typeface="思源黑体 CN Heavy" panose="020B0A00000000000000" pitchFamily="34" charset="-122"/>
+                <a:ea typeface="思源黑体 CN Heavy" panose="020B0A00000000000000" pitchFamily="34" charset="-122"/>
+              </a:rPr>
+              <a:t>层级的概念</a:t>
+            </a:r>
+            <a:endParaRPr lang="en-US" altLang="zh-CN" sz="2800" dirty="0">
+              <a:solidFill>
+                <a:srgbClr val="FFC000"/>
+              </a:solidFill>
+              <a:latin typeface="思源黑体 CN Heavy" panose="020B0A00000000000000" pitchFamily="34" charset="-122"/>
+              <a:ea typeface="思源黑体 CN Heavy" panose="020B0A00000000000000" pitchFamily="34" charset="-122"/>
+            </a:endParaRPr>
+          </a:p>
+          <a:p>
+            <a:endParaRPr lang="en-US" altLang="zh-CN" sz="2800" dirty="0">
+              <a:solidFill>
+                <a:srgbClr val="FFC000"/>
+              </a:solidFill>
+              <a:latin typeface="思源黑体 CN Heavy" panose="020B0A00000000000000" pitchFamily="34" charset="-122"/>
+              <a:ea typeface="思源黑体 CN Heavy" panose="020B0A00000000000000" pitchFamily="34" charset="-122"/>
+            </a:endParaRPr>
+          </a:p>
+          <a:p>
+            <a:r>
+              <a:rPr lang="en-US" altLang="zh-CN" sz="2800" dirty="0" err="1">
+                <a:solidFill>
+                  <a:srgbClr val="FFC000"/>
+                </a:solidFill>
+                <a:latin typeface="思源黑体 CN Heavy" panose="020B0A00000000000000" pitchFamily="34" charset="-122"/>
+                <a:ea typeface="思源黑体 CN Heavy" panose="020B0A00000000000000" pitchFamily="34" charset="-122"/>
+              </a:rPr>
+              <a:t>NinePatchRect</a:t>
+            </a:r>
+            <a:r>
+              <a:rPr lang="zh-CN" altLang="en-US" sz="2800" dirty="0">
+                <a:solidFill>
+                  <a:srgbClr val="FFC000"/>
+                </a:solidFill>
+                <a:latin typeface="思源黑体 CN Heavy" panose="020B0A00000000000000" pitchFamily="34" charset="-122"/>
+                <a:ea typeface="思源黑体 CN Heavy" panose="020B0A00000000000000" pitchFamily="34" charset="-122"/>
+              </a:rPr>
+              <a:t>节点九宫格渲染图片</a:t>
+            </a:r>
+            <a:endParaRPr lang="en-US" altLang="zh-CN" sz="2800" dirty="0">
+              <a:solidFill>
+                <a:srgbClr val="FFC000"/>
+              </a:solidFill>
+              <a:latin typeface="思源黑体 CN Heavy" panose="020B0A00000000000000" pitchFamily="34" charset="-122"/>
+              <a:ea typeface="思源黑体 CN Heavy" panose="020B0A00000000000000" pitchFamily="34" charset="-122"/>
+            </a:endParaRPr>
+          </a:p>
+          <a:p>
+            <a:endParaRPr lang="en-US" altLang="zh-CN" sz="2800" dirty="0">
+              <a:solidFill>
+                <a:srgbClr val="FFC000"/>
+              </a:solidFill>
+              <a:latin typeface="思源黑体 CN Heavy" panose="020B0A00000000000000" pitchFamily="34" charset="-122"/>
+              <a:ea typeface="思源黑体 CN Heavy" panose="020B0A00000000000000" pitchFamily="34" charset="-122"/>
+            </a:endParaRPr>
+          </a:p>
+          <a:p>
+            <a:r>
+              <a:rPr lang="en-US" altLang="zh-CN" sz="2800" dirty="0">
+                <a:solidFill>
+                  <a:srgbClr val="FFC000"/>
+                </a:solidFill>
+                <a:latin typeface="思源黑体 CN Heavy" panose="020B0A00000000000000" pitchFamily="34" charset="-122"/>
+                <a:ea typeface="思源黑体 CN Heavy" panose="020B0A00000000000000" pitchFamily="34" charset="-122"/>
+              </a:rPr>
+              <a:t>Button</a:t>
+            </a:r>
+            <a:r>
+              <a:rPr lang="zh-CN" altLang="en-US" sz="2800" dirty="0">
+                <a:solidFill>
+                  <a:srgbClr val="FFC000"/>
+                </a:solidFill>
+                <a:latin typeface="思源黑体 CN Heavy" panose="020B0A00000000000000" pitchFamily="34" charset="-122"/>
+                <a:ea typeface="思源黑体 CN Heavy" panose="020B0A00000000000000" pitchFamily="34" charset="-122"/>
+              </a:rPr>
+              <a:t>节点使用</a:t>
+            </a:r>
+            <a:r>
+              <a:rPr lang="en-US" altLang="zh-CN" sz="2800" dirty="0" err="1">
+                <a:solidFill>
+                  <a:srgbClr val="FFC000"/>
+                </a:solidFill>
+                <a:latin typeface="思源黑体 CN Heavy" panose="020B0A00000000000000" pitchFamily="34" charset="-122"/>
+                <a:ea typeface="思源黑体 CN Heavy" panose="020B0A00000000000000" pitchFamily="34" charset="-122"/>
+              </a:rPr>
+              <a:t>StyleBoxTexture</a:t>
+            </a:r>
+            <a:r>
+              <a:rPr lang="zh-CN" altLang="en-US" sz="2800" dirty="0">
+                <a:solidFill>
+                  <a:srgbClr val="FFC000"/>
+                </a:solidFill>
+                <a:latin typeface="思源黑体 CN Heavy" panose="020B0A00000000000000" pitchFamily="34" charset="-122"/>
+                <a:ea typeface="思源黑体 CN Heavy" panose="020B0A00000000000000" pitchFamily="34" charset="-122"/>
+              </a:rPr>
+              <a:t>实现九宫格渲染底图</a:t>
+            </a:r>
+            <a:endParaRPr lang="en-US" altLang="zh-CN" sz="2800" dirty="0">
+              <a:solidFill>
+                <a:srgbClr val="FFC000"/>
+              </a:solidFill>
+              <a:latin typeface="思源黑体 CN Heavy" panose="020B0A00000000000000" pitchFamily="34" charset="-122"/>
+              <a:ea typeface="思源黑体 CN Heavy" panose="020B0A00000000000000" pitchFamily="34" charset="-122"/>
+            </a:endParaRPr>
+          </a:p>
+        </p:txBody>
+      </p:sp>
+    </p:spTree>
+    <p:extLst>
+      <p:ext uri="{BB962C8B-B14F-4D97-AF65-F5344CB8AC3E}">
+        <p14:creationId xmlns:p14="http://schemas.microsoft.com/office/powerpoint/2010/main" val="2674005878"/>
+      </p:ext>
+    </p:extLst>
+  </p:cSld>
+  <p:clrMapOvr>
+    <a:masterClrMapping/>
+  </p:clrMapOvr>
+</p:sld>
+</file>
+
+<file path=ppt/slides/slide11.xml><?xml version="1.0" encoding="utf-8"?>
+<p:sld xmlns:a="http://schemas.openxmlformats.org/drawingml/2006/main" xmlns:r="http://schemas.openxmlformats.org/officeDocument/2006/relationships" xmlns:p="http://schemas.openxmlformats.org/presentationml/2006/main">
+  <p:cSld>
+    <p:spTree>
+      <p:nvGrpSpPr>
+        <p:cNvPr id="1" name=""/>
+        <p:cNvGrpSpPr/>
+        <p:nvPr/>
+      </p:nvGrpSpPr>
+      <p:grpSpPr>
+        <a:xfrm>
+          <a:off x="0" y="0"/>
+          <a:ext cx="0" cy="0"/>
+          <a:chOff x="0" y="0"/>
+          <a:chExt cx="0" cy="0"/>
+        </a:xfrm>
+      </p:grpSpPr>
+      <p:sp>
+        <p:nvSpPr>
+          <p:cNvPr id="2" name="文本框 1">
+            <a:extLst>
+              <a:ext uri="{FF2B5EF4-FFF2-40B4-BE49-F238E27FC236}">
+                <a16:creationId xmlns:a16="http://schemas.microsoft.com/office/drawing/2014/main" id="{F106E657-9145-AEE1-B2E0-F2A4EB6B63B2}"/>
+              </a:ext>
+            </a:extLst>
+          </p:cNvPr>
+          <p:cNvSpPr txBox="1"/>
+          <p:nvPr/>
+        </p:nvSpPr>
+        <p:spPr>
+          <a:xfrm>
+            <a:off x="912600" y="897058"/>
+            <a:ext cx="8240278" cy="584775"/>
+          </a:xfrm>
+          <a:prstGeom prst="rect">
+            <a:avLst/>
+          </a:prstGeom>
+          <a:noFill/>
+        </p:spPr>
+        <p:txBody>
+          <a:bodyPr wrap="square" rtlCol="0">
+            <a:spAutoFit/>
+          </a:bodyPr>
+          <a:lstStyle/>
+          <a:p>
+            <a:r>
+              <a:rPr lang="en-US" altLang="zh-CN" sz="3200" dirty="0">
+                <a:solidFill>
+                  <a:srgbClr val="92D050"/>
+                </a:solidFill>
+                <a:latin typeface="思源黑体 CN Heavy" panose="020B0A00000000000000" pitchFamily="34" charset="-122"/>
+                <a:ea typeface="思源黑体 CN Heavy" panose="020B0A00000000000000" pitchFamily="34" charset="-122"/>
+              </a:rPr>
+              <a:t>05</a:t>
+            </a:r>
+            <a:r>
+              <a:rPr lang="zh-CN" altLang="en-US" sz="3200" dirty="0">
+                <a:solidFill>
+                  <a:srgbClr val="92D050"/>
+                </a:solidFill>
+                <a:latin typeface="思源黑体 CN Heavy" panose="020B0A00000000000000" pitchFamily="34" charset="-122"/>
+                <a:ea typeface="思源黑体 CN Heavy" panose="020B0A00000000000000" pitchFamily="34" charset="-122"/>
+              </a:rPr>
+              <a:t>、面板控制单例</a:t>
+            </a:r>
+          </a:p>
+        </p:txBody>
+      </p:sp>
+      <p:sp>
+        <p:nvSpPr>
+          <p:cNvPr id="3" name="文本框 2">
+            <a:extLst>
+              <a:ext uri="{FF2B5EF4-FFF2-40B4-BE49-F238E27FC236}">
+                <a16:creationId xmlns:a16="http://schemas.microsoft.com/office/drawing/2014/main" id="{86570EB3-7342-9C5D-B2CD-B1E565A85806}"/>
+              </a:ext>
+            </a:extLst>
+          </p:cNvPr>
+          <p:cNvSpPr txBox="1"/>
+          <p:nvPr/>
+        </p:nvSpPr>
+        <p:spPr>
+          <a:xfrm>
+            <a:off x="912600" y="2123657"/>
+            <a:ext cx="10956846" cy="2246769"/>
+          </a:xfrm>
+          <a:prstGeom prst="rect">
+            <a:avLst/>
+          </a:prstGeom>
+          <a:noFill/>
+        </p:spPr>
+        <p:txBody>
+          <a:bodyPr wrap="square" rtlCol="0">
+            <a:spAutoFit/>
+          </a:bodyPr>
+          <a:lstStyle/>
+          <a:p>
+            <a:r>
+              <a:rPr lang="zh-CN" altLang="en-US" sz="2800" dirty="0">
+                <a:solidFill>
+                  <a:srgbClr val="FFC000"/>
+                </a:solidFill>
+                <a:latin typeface="思源黑体 CN Heavy" panose="020B0A00000000000000" pitchFamily="34" charset="-122"/>
+                <a:ea typeface="思源黑体 CN Heavy" panose="020B0A00000000000000" pitchFamily="34" charset="-122"/>
+              </a:rPr>
+              <a:t>从根节点检索节点</a:t>
+            </a:r>
+            <a:endParaRPr lang="en-US" altLang="zh-CN" sz="2800" dirty="0">
+              <a:solidFill>
+                <a:srgbClr val="FFC000"/>
+              </a:solidFill>
+              <a:latin typeface="思源黑体 CN Heavy" panose="020B0A00000000000000" pitchFamily="34" charset="-122"/>
+              <a:ea typeface="思源黑体 CN Heavy" panose="020B0A00000000000000" pitchFamily="34" charset="-122"/>
+            </a:endParaRPr>
+          </a:p>
+          <a:p>
+            <a:endParaRPr lang="en-US" altLang="zh-CN" sz="2800" dirty="0">
+              <a:solidFill>
+                <a:srgbClr val="FFC000"/>
+              </a:solidFill>
+              <a:latin typeface="思源黑体 CN Heavy" panose="020B0A00000000000000" pitchFamily="34" charset="-122"/>
+              <a:ea typeface="思源黑体 CN Heavy" panose="020B0A00000000000000" pitchFamily="34" charset="-122"/>
+            </a:endParaRPr>
+          </a:p>
+          <a:p>
+            <a:r>
+              <a:rPr lang="zh-CN" altLang="en-US" sz="2800" dirty="0">
+                <a:solidFill>
+                  <a:srgbClr val="FFC000"/>
+                </a:solidFill>
+                <a:latin typeface="思源黑体 CN Heavy" panose="020B0A00000000000000" pitchFamily="34" charset="-122"/>
+                <a:ea typeface="思源黑体 CN Heavy" panose="020B0A00000000000000" pitchFamily="34" charset="-122"/>
+              </a:rPr>
+              <a:t>写成</a:t>
+            </a:r>
+            <a:r>
+              <a:rPr lang="en-US" altLang="zh-CN" sz="2800" dirty="0">
+                <a:solidFill>
+                  <a:srgbClr val="FFC000"/>
+                </a:solidFill>
+                <a:latin typeface="思源黑体 CN Heavy" panose="020B0A00000000000000" pitchFamily="34" charset="-122"/>
+                <a:ea typeface="思源黑体 CN Heavy" panose="020B0A00000000000000" pitchFamily="34" charset="-122"/>
+              </a:rPr>
+              <a:t>Instance</a:t>
+            </a:r>
+            <a:r>
+              <a:rPr lang="zh-CN" altLang="en-US" sz="2800" dirty="0">
+                <a:solidFill>
+                  <a:srgbClr val="FFC000"/>
+                </a:solidFill>
+                <a:latin typeface="思源黑体 CN Heavy" panose="020B0A00000000000000" pitchFamily="34" charset="-122"/>
+                <a:ea typeface="思源黑体 CN Heavy" panose="020B0A00000000000000" pitchFamily="34" charset="-122"/>
+              </a:rPr>
+              <a:t>和不写的区别</a:t>
+            </a:r>
+            <a:endParaRPr lang="en-US" altLang="zh-CN" sz="2800" dirty="0">
+              <a:solidFill>
+                <a:srgbClr val="FFC000"/>
+              </a:solidFill>
+              <a:latin typeface="思源黑体 CN Heavy" panose="020B0A00000000000000" pitchFamily="34" charset="-122"/>
+              <a:ea typeface="思源黑体 CN Heavy" panose="020B0A00000000000000" pitchFamily="34" charset="-122"/>
+            </a:endParaRPr>
+          </a:p>
+          <a:p>
+            <a:endParaRPr lang="en-US" altLang="zh-CN" sz="2800" dirty="0">
+              <a:solidFill>
+                <a:srgbClr val="FFC000"/>
+              </a:solidFill>
+              <a:latin typeface="思源黑体 CN Heavy" panose="020B0A00000000000000" pitchFamily="34" charset="-122"/>
+              <a:ea typeface="思源黑体 CN Heavy" panose="020B0A00000000000000" pitchFamily="34" charset="-122"/>
+            </a:endParaRPr>
+          </a:p>
+          <a:p>
+            <a:r>
+              <a:rPr lang="zh-CN" altLang="en-US" sz="2800" dirty="0">
+                <a:solidFill>
+                  <a:srgbClr val="FFC000"/>
+                </a:solidFill>
+                <a:latin typeface="思源黑体 CN Heavy" panose="020B0A00000000000000" pitchFamily="34" charset="-122"/>
+                <a:ea typeface="思源黑体 CN Heavy" panose="020B0A00000000000000" pitchFamily="34" charset="-122"/>
+              </a:rPr>
+              <a:t>用枚举维护</a:t>
+            </a:r>
+            <a:r>
+              <a:rPr lang="en-US" altLang="zh-CN" sz="2800" dirty="0">
+                <a:solidFill>
+                  <a:srgbClr val="FFC000"/>
+                </a:solidFill>
+                <a:latin typeface="思源黑体 CN Heavy" panose="020B0A00000000000000" pitchFamily="34" charset="-122"/>
+                <a:ea typeface="思源黑体 CN Heavy" panose="020B0A00000000000000" pitchFamily="34" charset="-122"/>
+              </a:rPr>
+              <a:t>UI</a:t>
+            </a:r>
+            <a:r>
+              <a:rPr lang="zh-CN" altLang="en-US" sz="2800" dirty="0">
+                <a:solidFill>
+                  <a:srgbClr val="FFC000"/>
+                </a:solidFill>
+                <a:latin typeface="思源黑体 CN Heavy" panose="020B0A00000000000000" pitchFamily="34" charset="-122"/>
+                <a:ea typeface="思源黑体 CN Heavy" panose="020B0A00000000000000" pitchFamily="34" charset="-122"/>
+              </a:rPr>
+              <a:t>面板名称</a:t>
+            </a:r>
+            <a:endParaRPr lang="en-US" altLang="zh-CN" sz="2800" dirty="0">
+              <a:solidFill>
+                <a:srgbClr val="FFC000"/>
+              </a:solidFill>
+              <a:latin typeface="思源黑体 CN Heavy" panose="020B0A00000000000000" pitchFamily="34" charset="-122"/>
+              <a:ea typeface="思源黑体 CN Heavy" panose="020B0A00000000000000" pitchFamily="34" charset="-122"/>
+            </a:endParaRPr>
+          </a:p>
+        </p:txBody>
+      </p:sp>
+    </p:spTree>
+    <p:extLst>
+      <p:ext uri="{BB962C8B-B14F-4D97-AF65-F5344CB8AC3E}">
+        <p14:creationId xmlns:p14="http://schemas.microsoft.com/office/powerpoint/2010/main" val="4066446345"/>
+      </p:ext>
+    </p:extLst>
+  </p:cSld>
+  <p:clrMapOvr>
+    <a:masterClrMapping/>
+  </p:clrMapOvr>
+</p:sld>
+</file>
+
 <file path=ppt/slides/slide2.xml><?xml version="1.0" encoding="utf-8"?>
 <p:sld xmlns:a="http://schemas.openxmlformats.org/drawingml/2006/main" xmlns:r="http://schemas.openxmlformats.org/officeDocument/2006/relationships" xmlns:p="http://schemas.openxmlformats.org/presentationml/2006/main">
   <p:cSld>

--- a/Lesson1/Godot入门实践蛙里奥教程内容.pptx
+++ b/Lesson1/Godot入门实践蛙里奥教程内容.pptx
@@ -16,6 +16,7 @@
     <p:sldId id="264" r:id="rId10"/>
     <p:sldId id="265" r:id="rId11"/>
     <p:sldId id="266" r:id="rId12"/>
+    <p:sldId id="267" r:id="rId13"/>
   </p:sldIdLst>
   <p:sldSz cx="12192000" cy="6858000"/>
   <p:notesSz cx="6858000" cy="9144000"/>
@@ -335,7 +336,7 @@
           <a:p>
             <a:fld id="{9B9F07B0-025E-4E92-AC39-0EAAEC335187}" type="datetimeFigureOut">
               <a:rPr lang="zh-CN" altLang="en-US" smtClean="0"/>
-              <a:t>2026/5/4</a:t>
+              <a:t>2026/5/6</a:t>
             </a:fld>
             <a:endParaRPr lang="zh-CN" altLang="en-US"/>
           </a:p>
@@ -626,7 +627,7 @@
           <a:p>
             <a:fld id="{9B9F07B0-025E-4E92-AC39-0EAAEC335187}" type="datetimeFigureOut">
               <a:rPr lang="zh-CN" altLang="en-US" smtClean="0"/>
-              <a:t>2026/5/4</a:t>
+              <a:t>2026/5/6</a:t>
             </a:fld>
             <a:endParaRPr lang="zh-CN" altLang="en-US"/>
           </a:p>
@@ -885,7 +886,7 @@
           <a:p>
             <a:fld id="{9B9F07B0-025E-4E92-AC39-0EAAEC335187}" type="datetimeFigureOut">
               <a:rPr lang="zh-CN" altLang="en-US" smtClean="0"/>
-              <a:t>2026/5/4</a:t>
+              <a:t>2026/5/6</a:t>
             </a:fld>
             <a:endParaRPr lang="zh-CN" altLang="en-US"/>
           </a:p>
@@ -1354,7 +1355,7 @@
           <a:p>
             <a:fld id="{9B9F07B0-025E-4E92-AC39-0EAAEC335187}" type="datetimeFigureOut">
               <a:rPr lang="zh-CN" altLang="en-US" smtClean="0"/>
-              <a:t>2026/5/4</a:t>
+              <a:t>2026/5/6</a:t>
             </a:fld>
             <a:endParaRPr lang="zh-CN" altLang="en-US"/>
           </a:p>
@@ -1534,7 +1535,7 @@
           <a:p>
             <a:fld id="{9B9F07B0-025E-4E92-AC39-0EAAEC335187}" type="datetimeFigureOut">
               <a:rPr lang="zh-CN" altLang="en-US" smtClean="0"/>
-              <a:t>2026/5/4</a:t>
+              <a:t>2026/5/6</a:t>
             </a:fld>
             <a:endParaRPr lang="zh-CN" altLang="en-US"/>
           </a:p>
@@ -2110,7 +2111,7 @@
           <a:p>
             <a:fld id="{9B9F07B0-025E-4E92-AC39-0EAAEC335187}" type="datetimeFigureOut">
               <a:rPr lang="zh-CN" altLang="en-US" smtClean="0"/>
-              <a:t>2026/5/4</a:t>
+              <a:t>2026/5/6</a:t>
             </a:fld>
             <a:endParaRPr lang="zh-CN" altLang="en-US"/>
           </a:p>
@@ -2442,7 +2443,7 @@
           <a:p>
             <a:fld id="{9B9F07B0-025E-4E92-AC39-0EAAEC335187}" type="datetimeFigureOut">
               <a:rPr lang="zh-CN" altLang="en-US" smtClean="0"/>
-              <a:t>2026/5/4</a:t>
+              <a:t>2026/5/6</a:t>
             </a:fld>
             <a:endParaRPr lang="zh-CN" altLang="en-US"/>
           </a:p>
@@ -2617,7 +2618,7 @@
           <a:p>
             <a:fld id="{9B9F07B0-025E-4E92-AC39-0EAAEC335187}" type="datetimeFigureOut">
               <a:rPr lang="zh-CN" altLang="en-US" smtClean="0"/>
-              <a:t>2026/5/4</a:t>
+              <a:t>2026/5/6</a:t>
             </a:fld>
             <a:endParaRPr lang="zh-CN" altLang="en-US"/>
           </a:p>
@@ -2797,7 +2798,7 @@
           <a:p>
             <a:fld id="{9B9F07B0-025E-4E92-AC39-0EAAEC335187}" type="datetimeFigureOut">
               <a:rPr lang="zh-CN" altLang="en-US" smtClean="0"/>
-              <a:t>2026/5/4</a:t>
+              <a:t>2026/5/6</a:t>
             </a:fld>
             <a:endParaRPr lang="zh-CN" altLang="en-US"/>
           </a:p>
@@ -2967,7 +2968,7 @@
           <a:p>
             <a:fld id="{9B9F07B0-025E-4E92-AC39-0EAAEC335187}" type="datetimeFigureOut">
               <a:rPr lang="zh-CN" altLang="en-US" smtClean="0"/>
-              <a:t>2026/5/4</a:t>
+              <a:t>2026/5/6</a:t>
             </a:fld>
             <a:endParaRPr lang="zh-CN" altLang="en-US"/>
           </a:p>
@@ -3224,7 +3225,7 @@
           <a:p>
             <a:fld id="{9B9F07B0-025E-4E92-AC39-0EAAEC335187}" type="datetimeFigureOut">
               <a:rPr lang="zh-CN" altLang="en-US" smtClean="0"/>
-              <a:t>2026/5/4</a:t>
+              <a:t>2026/5/6</a:t>
             </a:fld>
             <a:endParaRPr lang="zh-CN" altLang="en-US"/>
           </a:p>
@@ -3516,7 +3517,7 @@
           <a:p>
             <a:fld id="{9B9F07B0-025E-4E92-AC39-0EAAEC335187}" type="datetimeFigureOut">
               <a:rPr lang="zh-CN" altLang="en-US" smtClean="0"/>
-              <a:t>2026/5/4</a:t>
+              <a:t>2026/5/6</a:t>
             </a:fld>
             <a:endParaRPr lang="zh-CN" altLang="en-US"/>
           </a:p>
@@ -3946,7 +3947,7 @@
           <a:p>
             <a:fld id="{9B9F07B0-025E-4E92-AC39-0EAAEC335187}" type="datetimeFigureOut">
               <a:rPr lang="zh-CN" altLang="en-US" smtClean="0"/>
-              <a:t>2026/5/4</a:t>
+              <a:t>2026/5/6</a:t>
             </a:fld>
             <a:endParaRPr lang="zh-CN" altLang="en-US"/>
           </a:p>
@@ -4064,7 +4065,7 @@
           <a:p>
             <a:fld id="{9B9F07B0-025E-4E92-AC39-0EAAEC335187}" type="datetimeFigureOut">
               <a:rPr lang="zh-CN" altLang="en-US" smtClean="0"/>
-              <a:t>2026/5/4</a:t>
+              <a:t>2026/5/6</a:t>
             </a:fld>
             <a:endParaRPr lang="zh-CN" altLang="en-US"/>
           </a:p>
@@ -4159,7 +4160,7 @@
           <a:p>
             <a:fld id="{9B9F07B0-025E-4E92-AC39-0EAAEC335187}" type="datetimeFigureOut">
               <a:rPr lang="zh-CN" altLang="en-US" smtClean="0"/>
-              <a:t>2026/5/4</a:t>
+              <a:t>2026/5/6</a:t>
             </a:fld>
             <a:endParaRPr lang="zh-CN" altLang="en-US"/>
           </a:p>
@@ -4442,7 +4443,7 @@
           <a:p>
             <a:fld id="{9B9F07B0-025E-4E92-AC39-0EAAEC335187}" type="datetimeFigureOut">
               <a:rPr lang="zh-CN" altLang="en-US" smtClean="0"/>
-              <a:t>2026/5/4</a:t>
+              <a:t>2026/5/6</a:t>
             </a:fld>
             <a:endParaRPr lang="zh-CN" altLang="en-US"/>
           </a:p>
@@ -4733,7 +4734,7 @@
           <a:p>
             <a:fld id="{9B9F07B0-025E-4E92-AC39-0EAAEC335187}" type="datetimeFigureOut">
               <a:rPr lang="zh-CN" altLang="en-US" smtClean="0"/>
-              <a:t>2026/5/4</a:t>
+              <a:t>2026/5/6</a:t>
             </a:fld>
             <a:endParaRPr lang="zh-CN" altLang="en-US"/>
           </a:p>
@@ -4964,7 +4965,7 @@
           <a:p>
             <a:fld id="{9B9F07B0-025E-4E92-AC39-0EAAEC335187}" type="datetimeFigureOut">
               <a:rPr lang="zh-CN" altLang="en-US" smtClean="0"/>
-              <a:t>2026/5/4</a:t>
+              <a:t>2026/5/6</a:t>
             </a:fld>
             <a:endParaRPr lang="zh-CN" altLang="en-US"/>
           </a:p>
@@ -6426,6 +6427,239 @@
 </p:sld>
 </file>
 
+<file path=ppt/slides/slide12.xml><?xml version="1.0" encoding="utf-8"?>
+<p:sld xmlns:a="http://schemas.openxmlformats.org/drawingml/2006/main" xmlns:r="http://schemas.openxmlformats.org/officeDocument/2006/relationships" xmlns:p="http://schemas.openxmlformats.org/presentationml/2006/main">
+  <p:cSld>
+    <p:spTree>
+      <p:nvGrpSpPr>
+        <p:cNvPr id="1" name=""/>
+        <p:cNvGrpSpPr/>
+        <p:nvPr/>
+      </p:nvGrpSpPr>
+      <p:grpSpPr>
+        <a:xfrm>
+          <a:off x="0" y="0"/>
+          <a:ext cx="0" cy="0"/>
+          <a:chOff x="0" y="0"/>
+          <a:chExt cx="0" cy="0"/>
+        </a:xfrm>
+      </p:grpSpPr>
+      <p:sp>
+        <p:nvSpPr>
+          <p:cNvPr id="2" name="文本框 1">
+            <a:extLst>
+              <a:ext uri="{FF2B5EF4-FFF2-40B4-BE49-F238E27FC236}">
+                <a16:creationId xmlns:a16="http://schemas.microsoft.com/office/drawing/2014/main" id="{0FF5AE81-9620-A0E3-E4E3-53A013512F3E}"/>
+              </a:ext>
+            </a:extLst>
+          </p:cNvPr>
+          <p:cNvSpPr txBox="1"/>
+          <p:nvPr/>
+        </p:nvSpPr>
+        <p:spPr>
+          <a:xfrm>
+            <a:off x="912600" y="897058"/>
+            <a:ext cx="8240278" cy="584775"/>
+          </a:xfrm>
+          <a:prstGeom prst="rect">
+            <a:avLst/>
+          </a:prstGeom>
+          <a:noFill/>
+        </p:spPr>
+        <p:txBody>
+          <a:bodyPr wrap="square" rtlCol="0">
+            <a:spAutoFit/>
+          </a:bodyPr>
+          <a:lstStyle/>
+          <a:p>
+            <a:r>
+              <a:rPr lang="en-US" altLang="zh-CN" sz="3200" dirty="0">
+                <a:solidFill>
+                  <a:srgbClr val="92D050"/>
+                </a:solidFill>
+                <a:latin typeface="思源黑体 CN Heavy" panose="020B0A00000000000000" pitchFamily="34" charset="-122"/>
+                <a:ea typeface="思源黑体 CN Heavy" panose="020B0A00000000000000" pitchFamily="34" charset="-122"/>
+              </a:rPr>
+              <a:t>06</a:t>
+            </a:r>
+            <a:r>
+              <a:rPr lang="zh-CN" altLang="en-US" sz="3200" dirty="0">
+                <a:solidFill>
+                  <a:srgbClr val="92D050"/>
+                </a:solidFill>
+                <a:latin typeface="思源黑体 CN Heavy" panose="020B0A00000000000000" pitchFamily="34" charset="-122"/>
+                <a:ea typeface="思源黑体 CN Heavy" panose="020B0A00000000000000" pitchFamily="34" charset="-122"/>
+              </a:rPr>
+              <a:t>、声音控制单例</a:t>
+            </a:r>
+          </a:p>
+        </p:txBody>
+      </p:sp>
+      <p:sp>
+        <p:nvSpPr>
+          <p:cNvPr id="3" name="文本框 2">
+            <a:extLst>
+              <a:ext uri="{FF2B5EF4-FFF2-40B4-BE49-F238E27FC236}">
+                <a16:creationId xmlns:a16="http://schemas.microsoft.com/office/drawing/2014/main" id="{54877CCA-35F4-1A54-D0AB-6E55D77E31B2}"/>
+              </a:ext>
+            </a:extLst>
+          </p:cNvPr>
+          <p:cNvSpPr txBox="1"/>
+          <p:nvPr/>
+        </p:nvSpPr>
+        <p:spPr>
+          <a:xfrm>
+            <a:off x="912600" y="2123657"/>
+            <a:ext cx="10956846" cy="3108543"/>
+          </a:xfrm>
+          <a:prstGeom prst="rect">
+            <a:avLst/>
+          </a:prstGeom>
+          <a:noFill/>
+        </p:spPr>
+        <p:txBody>
+          <a:bodyPr wrap="square" rtlCol="0">
+            <a:spAutoFit/>
+          </a:bodyPr>
+          <a:lstStyle/>
+          <a:p>
+            <a:r>
+              <a:rPr lang="en-US" altLang="zh-CN" sz="2800" dirty="0" err="1">
+                <a:solidFill>
+                  <a:srgbClr val="FFC000"/>
+                </a:solidFill>
+                <a:latin typeface="思源黑体 CN Heavy" panose="020B0A00000000000000" pitchFamily="34" charset="-122"/>
+                <a:ea typeface="思源黑体 CN Heavy" panose="020B0A00000000000000" pitchFamily="34" charset="-122"/>
+              </a:rPr>
+              <a:t>AudioStreamPlayer</a:t>
+            </a:r>
+            <a:r>
+              <a:rPr lang="zh-CN" altLang="en-US" sz="2800" dirty="0">
+                <a:solidFill>
+                  <a:srgbClr val="FFC000"/>
+                </a:solidFill>
+                <a:latin typeface="思源黑体 CN Heavy" panose="020B0A00000000000000" pitchFamily="34" charset="-122"/>
+                <a:ea typeface="思源黑体 CN Heavy" panose="020B0A00000000000000" pitchFamily="34" charset="-122"/>
+              </a:rPr>
+              <a:t>节点的使用</a:t>
+            </a:r>
+            <a:endParaRPr lang="en-US" altLang="zh-CN" sz="2800" dirty="0">
+              <a:solidFill>
+                <a:srgbClr val="FFC000"/>
+              </a:solidFill>
+              <a:latin typeface="思源黑体 CN Heavy" panose="020B0A00000000000000" pitchFamily="34" charset="-122"/>
+              <a:ea typeface="思源黑体 CN Heavy" panose="020B0A00000000000000" pitchFamily="34" charset="-122"/>
+            </a:endParaRPr>
+          </a:p>
+          <a:p>
+            <a:endParaRPr lang="en-US" altLang="zh-CN" sz="2800" dirty="0">
+              <a:solidFill>
+                <a:srgbClr val="FFC000"/>
+              </a:solidFill>
+              <a:latin typeface="思源黑体 CN Heavy" panose="020B0A00000000000000" pitchFamily="34" charset="-122"/>
+              <a:ea typeface="思源黑体 CN Heavy" panose="020B0A00000000000000" pitchFamily="34" charset="-122"/>
+            </a:endParaRPr>
+          </a:p>
+          <a:p>
+            <a:r>
+              <a:rPr lang="zh-CN" altLang="en-US" sz="2800" dirty="0">
+                <a:solidFill>
+                  <a:srgbClr val="FFC000"/>
+                </a:solidFill>
+                <a:latin typeface="思源黑体 CN Heavy" panose="020B0A00000000000000" pitchFamily="34" charset="-122"/>
+                <a:ea typeface="思源黑体 CN Heavy" panose="020B0A00000000000000" pitchFamily="34" charset="-122"/>
+              </a:rPr>
+              <a:t>设置声音循环</a:t>
+            </a:r>
+            <a:endParaRPr lang="en-US" altLang="zh-CN" sz="2800" dirty="0">
+              <a:solidFill>
+                <a:srgbClr val="FFC000"/>
+              </a:solidFill>
+              <a:latin typeface="思源黑体 CN Heavy" panose="020B0A00000000000000" pitchFamily="34" charset="-122"/>
+              <a:ea typeface="思源黑体 CN Heavy" panose="020B0A00000000000000" pitchFamily="34" charset="-122"/>
+            </a:endParaRPr>
+          </a:p>
+          <a:p>
+            <a:endParaRPr lang="en-US" altLang="zh-CN" sz="2800" dirty="0">
+              <a:solidFill>
+                <a:srgbClr val="FFC000"/>
+              </a:solidFill>
+              <a:latin typeface="思源黑体 CN Heavy" panose="020B0A00000000000000" pitchFamily="34" charset="-122"/>
+              <a:ea typeface="思源黑体 CN Heavy" panose="020B0A00000000000000" pitchFamily="34" charset="-122"/>
+            </a:endParaRPr>
+          </a:p>
+          <a:p>
+            <a:r>
+              <a:rPr lang="zh-CN" altLang="en-US" sz="2800" dirty="0">
+                <a:solidFill>
+                  <a:srgbClr val="FFC000"/>
+                </a:solidFill>
+                <a:latin typeface="思源黑体 CN Heavy" panose="020B0A00000000000000" pitchFamily="34" charset="-122"/>
+                <a:ea typeface="思源黑体 CN Heavy" panose="020B0A00000000000000" pitchFamily="34" charset="-122"/>
+              </a:rPr>
+              <a:t>动态加载声音资源</a:t>
+            </a:r>
+            <a:endParaRPr lang="en-US" altLang="zh-CN" sz="2800" dirty="0">
+              <a:solidFill>
+                <a:srgbClr val="FFC000"/>
+              </a:solidFill>
+              <a:latin typeface="思源黑体 CN Heavy" panose="020B0A00000000000000" pitchFamily="34" charset="-122"/>
+              <a:ea typeface="思源黑体 CN Heavy" panose="020B0A00000000000000" pitchFamily="34" charset="-122"/>
+            </a:endParaRPr>
+          </a:p>
+          <a:p>
+            <a:endParaRPr lang="en-US" altLang="zh-CN" sz="2800" dirty="0">
+              <a:solidFill>
+                <a:srgbClr val="FFC000"/>
+              </a:solidFill>
+              <a:latin typeface="思源黑体 CN Heavy" panose="020B0A00000000000000" pitchFamily="34" charset="-122"/>
+              <a:ea typeface="思源黑体 CN Heavy" panose="020B0A00000000000000" pitchFamily="34" charset="-122"/>
+            </a:endParaRPr>
+          </a:p>
+          <a:p>
+            <a:r>
+              <a:rPr lang="en-US" altLang="zh-CN" sz="2800" dirty="0" err="1">
+                <a:solidFill>
+                  <a:srgbClr val="FFC000"/>
+                </a:solidFill>
+                <a:latin typeface="思源黑体 CN Heavy" panose="020B0A00000000000000" pitchFamily="34" charset="-122"/>
+                <a:ea typeface="思源黑体 CN Heavy" panose="020B0A00000000000000" pitchFamily="34" charset="-122"/>
+              </a:rPr>
+              <a:t>Mathf.LinearToDb</a:t>
+            </a:r>
+            <a:r>
+              <a:rPr lang="zh-CN" altLang="en-US" sz="2800">
+                <a:solidFill>
+                  <a:srgbClr val="FFC000"/>
+                </a:solidFill>
+                <a:latin typeface="思源黑体 CN Heavy" panose="020B0A00000000000000" pitchFamily="34" charset="-122"/>
+                <a:ea typeface="思源黑体 CN Heavy" panose="020B0A00000000000000" pitchFamily="34" charset="-122"/>
+              </a:rPr>
+              <a:t>音量转换方法</a:t>
+            </a:r>
+            <a:endParaRPr lang="en-US" altLang="zh-CN" sz="2800" dirty="0">
+              <a:solidFill>
+                <a:srgbClr val="FFC000"/>
+              </a:solidFill>
+              <a:latin typeface="思源黑体 CN Heavy" panose="020B0A00000000000000" pitchFamily="34" charset="-122"/>
+              <a:ea typeface="思源黑体 CN Heavy" panose="020B0A00000000000000" pitchFamily="34" charset="-122"/>
+            </a:endParaRPr>
+          </a:p>
+        </p:txBody>
+      </p:sp>
+    </p:spTree>
+    <p:extLst>
+      <p:ext uri="{BB962C8B-B14F-4D97-AF65-F5344CB8AC3E}">
+        <p14:creationId xmlns:p14="http://schemas.microsoft.com/office/powerpoint/2010/main" val="3125150491"/>
+      </p:ext>
+    </p:extLst>
+  </p:cSld>
+  <p:clrMapOvr>
+    <a:masterClrMapping/>
+  </p:clrMapOvr>
+</p:sld>
+</file>
+
 <file path=ppt/slides/slide2.xml><?xml version="1.0" encoding="utf-8"?>
 <p:sld xmlns:a="http://schemas.openxmlformats.org/drawingml/2006/main" xmlns:r="http://schemas.openxmlformats.org/officeDocument/2006/relationships" xmlns:p="http://schemas.openxmlformats.org/presentationml/2006/main">
   <p:cSld>

--- a/Lesson1/Godot入门实践蛙里奥教程内容.pptx
+++ b/Lesson1/Godot入门实践蛙里奥教程内容.pptx
@@ -17,6 +17,7 @@
     <p:sldId id="265" r:id="rId11"/>
     <p:sldId id="266" r:id="rId12"/>
     <p:sldId id="267" r:id="rId13"/>
+    <p:sldId id="268" r:id="rId14"/>
   </p:sldIdLst>
   <p:sldSz cx="12192000" cy="6858000"/>
   <p:notesSz cx="6858000" cy="9144000"/>
@@ -336,7 +337,7 @@
           <a:p>
             <a:fld id="{9B9F07B0-025E-4E92-AC39-0EAAEC335187}" type="datetimeFigureOut">
               <a:rPr lang="zh-CN" altLang="en-US" smtClean="0"/>
-              <a:t>2026/5/6</a:t>
+              <a:t>2026/5/8</a:t>
             </a:fld>
             <a:endParaRPr lang="zh-CN" altLang="en-US"/>
           </a:p>
@@ -627,7 +628,7 @@
           <a:p>
             <a:fld id="{9B9F07B0-025E-4E92-AC39-0EAAEC335187}" type="datetimeFigureOut">
               <a:rPr lang="zh-CN" altLang="en-US" smtClean="0"/>
-              <a:t>2026/5/6</a:t>
+              <a:t>2026/5/8</a:t>
             </a:fld>
             <a:endParaRPr lang="zh-CN" altLang="en-US"/>
           </a:p>
@@ -886,7 +887,7 @@
           <a:p>
             <a:fld id="{9B9F07B0-025E-4E92-AC39-0EAAEC335187}" type="datetimeFigureOut">
               <a:rPr lang="zh-CN" altLang="en-US" smtClean="0"/>
-              <a:t>2026/5/6</a:t>
+              <a:t>2026/5/8</a:t>
             </a:fld>
             <a:endParaRPr lang="zh-CN" altLang="en-US"/>
           </a:p>
@@ -1355,7 +1356,7 @@
           <a:p>
             <a:fld id="{9B9F07B0-025E-4E92-AC39-0EAAEC335187}" type="datetimeFigureOut">
               <a:rPr lang="zh-CN" altLang="en-US" smtClean="0"/>
-              <a:t>2026/5/6</a:t>
+              <a:t>2026/5/8</a:t>
             </a:fld>
             <a:endParaRPr lang="zh-CN" altLang="en-US"/>
           </a:p>
@@ -1535,7 +1536,7 @@
           <a:p>
             <a:fld id="{9B9F07B0-025E-4E92-AC39-0EAAEC335187}" type="datetimeFigureOut">
               <a:rPr lang="zh-CN" altLang="en-US" smtClean="0"/>
-              <a:t>2026/5/6</a:t>
+              <a:t>2026/5/8</a:t>
             </a:fld>
             <a:endParaRPr lang="zh-CN" altLang="en-US"/>
           </a:p>
@@ -2111,7 +2112,7 @@
           <a:p>
             <a:fld id="{9B9F07B0-025E-4E92-AC39-0EAAEC335187}" type="datetimeFigureOut">
               <a:rPr lang="zh-CN" altLang="en-US" smtClean="0"/>
-              <a:t>2026/5/6</a:t>
+              <a:t>2026/5/8</a:t>
             </a:fld>
             <a:endParaRPr lang="zh-CN" altLang="en-US"/>
           </a:p>
@@ -2443,7 +2444,7 @@
           <a:p>
             <a:fld id="{9B9F07B0-025E-4E92-AC39-0EAAEC335187}" type="datetimeFigureOut">
               <a:rPr lang="zh-CN" altLang="en-US" smtClean="0"/>
-              <a:t>2026/5/6</a:t>
+              <a:t>2026/5/8</a:t>
             </a:fld>
             <a:endParaRPr lang="zh-CN" altLang="en-US"/>
           </a:p>
@@ -2618,7 +2619,7 @@
           <a:p>
             <a:fld id="{9B9F07B0-025E-4E92-AC39-0EAAEC335187}" type="datetimeFigureOut">
               <a:rPr lang="zh-CN" altLang="en-US" smtClean="0"/>
-              <a:t>2026/5/6</a:t>
+              <a:t>2026/5/8</a:t>
             </a:fld>
             <a:endParaRPr lang="zh-CN" altLang="en-US"/>
           </a:p>
@@ -2798,7 +2799,7 @@
           <a:p>
             <a:fld id="{9B9F07B0-025E-4E92-AC39-0EAAEC335187}" type="datetimeFigureOut">
               <a:rPr lang="zh-CN" altLang="en-US" smtClean="0"/>
-              <a:t>2026/5/6</a:t>
+              <a:t>2026/5/8</a:t>
             </a:fld>
             <a:endParaRPr lang="zh-CN" altLang="en-US"/>
           </a:p>
@@ -2968,7 +2969,7 @@
           <a:p>
             <a:fld id="{9B9F07B0-025E-4E92-AC39-0EAAEC335187}" type="datetimeFigureOut">
               <a:rPr lang="zh-CN" altLang="en-US" smtClean="0"/>
-              <a:t>2026/5/6</a:t>
+              <a:t>2026/5/8</a:t>
             </a:fld>
             <a:endParaRPr lang="zh-CN" altLang="en-US"/>
           </a:p>
@@ -3225,7 +3226,7 @@
           <a:p>
             <a:fld id="{9B9F07B0-025E-4E92-AC39-0EAAEC335187}" type="datetimeFigureOut">
               <a:rPr lang="zh-CN" altLang="en-US" smtClean="0"/>
-              <a:t>2026/5/6</a:t>
+              <a:t>2026/5/8</a:t>
             </a:fld>
             <a:endParaRPr lang="zh-CN" altLang="en-US"/>
           </a:p>
@@ -3517,7 +3518,7 @@
           <a:p>
             <a:fld id="{9B9F07B0-025E-4E92-AC39-0EAAEC335187}" type="datetimeFigureOut">
               <a:rPr lang="zh-CN" altLang="en-US" smtClean="0"/>
-              <a:t>2026/5/6</a:t>
+              <a:t>2026/5/8</a:t>
             </a:fld>
             <a:endParaRPr lang="zh-CN" altLang="en-US"/>
           </a:p>
@@ -3947,7 +3948,7 @@
           <a:p>
             <a:fld id="{9B9F07B0-025E-4E92-AC39-0EAAEC335187}" type="datetimeFigureOut">
               <a:rPr lang="zh-CN" altLang="en-US" smtClean="0"/>
-              <a:t>2026/5/6</a:t>
+              <a:t>2026/5/8</a:t>
             </a:fld>
             <a:endParaRPr lang="zh-CN" altLang="en-US"/>
           </a:p>
@@ -4065,7 +4066,7 @@
           <a:p>
             <a:fld id="{9B9F07B0-025E-4E92-AC39-0EAAEC335187}" type="datetimeFigureOut">
               <a:rPr lang="zh-CN" altLang="en-US" smtClean="0"/>
-              <a:t>2026/5/6</a:t>
+              <a:t>2026/5/8</a:t>
             </a:fld>
             <a:endParaRPr lang="zh-CN" altLang="en-US"/>
           </a:p>
@@ -4160,7 +4161,7 @@
           <a:p>
             <a:fld id="{9B9F07B0-025E-4E92-AC39-0EAAEC335187}" type="datetimeFigureOut">
               <a:rPr lang="zh-CN" altLang="en-US" smtClean="0"/>
-              <a:t>2026/5/6</a:t>
+              <a:t>2026/5/8</a:t>
             </a:fld>
             <a:endParaRPr lang="zh-CN" altLang="en-US"/>
           </a:p>
@@ -4443,7 +4444,7 @@
           <a:p>
             <a:fld id="{9B9F07B0-025E-4E92-AC39-0EAAEC335187}" type="datetimeFigureOut">
               <a:rPr lang="zh-CN" altLang="en-US" smtClean="0"/>
-              <a:t>2026/5/6</a:t>
+              <a:t>2026/5/8</a:t>
             </a:fld>
             <a:endParaRPr lang="zh-CN" altLang="en-US"/>
           </a:p>
@@ -4734,7 +4735,7 @@
           <a:p>
             <a:fld id="{9B9F07B0-025E-4E92-AC39-0EAAEC335187}" type="datetimeFigureOut">
               <a:rPr lang="zh-CN" altLang="en-US" smtClean="0"/>
-              <a:t>2026/5/6</a:t>
+              <a:t>2026/5/8</a:t>
             </a:fld>
             <a:endParaRPr lang="zh-CN" altLang="en-US"/>
           </a:p>
@@ -4965,7 +4966,7 @@
           <a:p>
             <a:fld id="{9B9F07B0-025E-4E92-AC39-0EAAEC335187}" type="datetimeFigureOut">
               <a:rPr lang="zh-CN" altLang="en-US" smtClean="0"/>
-              <a:t>2026/5/6</a:t>
+              <a:t>2026/5/8</a:t>
             </a:fld>
             <a:endParaRPr lang="zh-CN" altLang="en-US"/>
           </a:p>
@@ -6660,6 +6661,135 @@
 </p:sld>
 </file>
 
+<file path=ppt/slides/slide13.xml><?xml version="1.0" encoding="utf-8"?>
+<p:sld xmlns:a="http://schemas.openxmlformats.org/drawingml/2006/main" xmlns:r="http://schemas.openxmlformats.org/officeDocument/2006/relationships" xmlns:p="http://schemas.openxmlformats.org/presentationml/2006/main">
+  <p:cSld>
+    <p:spTree>
+      <p:nvGrpSpPr>
+        <p:cNvPr id="1" name=""/>
+        <p:cNvGrpSpPr/>
+        <p:nvPr/>
+      </p:nvGrpSpPr>
+      <p:grpSpPr>
+        <a:xfrm>
+          <a:off x="0" y="0"/>
+          <a:ext cx="0" cy="0"/>
+          <a:chOff x="0" y="0"/>
+          <a:chExt cx="0" cy="0"/>
+        </a:xfrm>
+      </p:grpSpPr>
+      <p:sp>
+        <p:nvSpPr>
+          <p:cNvPr id="2" name="文本框 1">
+            <a:extLst>
+              <a:ext uri="{FF2B5EF4-FFF2-40B4-BE49-F238E27FC236}">
+                <a16:creationId xmlns:a16="http://schemas.microsoft.com/office/drawing/2014/main" id="{DDE1A02C-3F61-6695-B04D-0F750013A1A9}"/>
+              </a:ext>
+            </a:extLst>
+          </p:cNvPr>
+          <p:cNvSpPr txBox="1"/>
+          <p:nvPr/>
+        </p:nvSpPr>
+        <p:spPr>
+          <a:xfrm>
+            <a:off x="912600" y="897058"/>
+            <a:ext cx="8240278" cy="584775"/>
+          </a:xfrm>
+          <a:prstGeom prst="rect">
+            <a:avLst/>
+          </a:prstGeom>
+          <a:noFill/>
+        </p:spPr>
+        <p:txBody>
+          <a:bodyPr wrap="square" rtlCol="0">
+            <a:spAutoFit/>
+          </a:bodyPr>
+          <a:lstStyle/>
+          <a:p>
+            <a:r>
+              <a:rPr lang="en-US" altLang="zh-CN" sz="3200" dirty="0">
+                <a:solidFill>
+                  <a:srgbClr val="92D050"/>
+                </a:solidFill>
+                <a:latin typeface="思源黑体 CN Heavy" panose="020B0A00000000000000" pitchFamily="34" charset="-122"/>
+                <a:ea typeface="思源黑体 CN Heavy" panose="020B0A00000000000000" pitchFamily="34" charset="-122"/>
+              </a:rPr>
+              <a:t>07</a:t>
+            </a:r>
+            <a:r>
+              <a:rPr lang="zh-CN" altLang="en-US" sz="3200" dirty="0">
+                <a:solidFill>
+                  <a:srgbClr val="92D050"/>
+                </a:solidFill>
+                <a:latin typeface="思源黑体 CN Heavy" panose="020B0A00000000000000" pitchFamily="34" charset="-122"/>
+                <a:ea typeface="思源黑体 CN Heavy" panose="020B0A00000000000000" pitchFamily="34" charset="-122"/>
+              </a:rPr>
+              <a:t>、声音事件绑定</a:t>
+            </a:r>
+          </a:p>
+        </p:txBody>
+      </p:sp>
+      <p:sp>
+        <p:nvSpPr>
+          <p:cNvPr id="3" name="文本框 2">
+            <a:extLst>
+              <a:ext uri="{FF2B5EF4-FFF2-40B4-BE49-F238E27FC236}">
+                <a16:creationId xmlns:a16="http://schemas.microsoft.com/office/drawing/2014/main" id="{A2DDD5A7-0AC4-8748-D025-F89ED5D1CB62}"/>
+              </a:ext>
+            </a:extLst>
+          </p:cNvPr>
+          <p:cNvSpPr txBox="1"/>
+          <p:nvPr/>
+        </p:nvSpPr>
+        <p:spPr>
+          <a:xfrm>
+            <a:off x="912600" y="2123657"/>
+            <a:ext cx="10956846" cy="523220"/>
+          </a:xfrm>
+          <a:prstGeom prst="rect">
+            <a:avLst/>
+          </a:prstGeom>
+          <a:noFill/>
+        </p:spPr>
+        <p:txBody>
+          <a:bodyPr wrap="square" rtlCol="0">
+            <a:spAutoFit/>
+          </a:bodyPr>
+          <a:lstStyle/>
+          <a:p>
+            <a:r>
+              <a:rPr lang="zh-CN" altLang="en-US" sz="2800" dirty="0">
+                <a:solidFill>
+                  <a:srgbClr val="FFC000"/>
+                </a:solidFill>
+                <a:latin typeface="思源黑体 CN Heavy" panose="020B0A00000000000000" pitchFamily="34" charset="-122"/>
+                <a:ea typeface="思源黑体 CN Heavy" panose="020B0A00000000000000" pitchFamily="34" charset="-122"/>
+              </a:rPr>
+              <a:t>无新知识点</a:t>
+            </a:r>
+            <a:endParaRPr lang="en-US" altLang="zh-CN" sz="2800" dirty="0">
+              <a:solidFill>
+                <a:srgbClr val="FFC000"/>
+              </a:solidFill>
+              <a:latin typeface="思源黑体 CN Heavy" panose="020B0A00000000000000" pitchFamily="34" charset="-122"/>
+              <a:ea typeface="思源黑体 CN Heavy" panose="020B0A00000000000000" pitchFamily="34" charset="-122"/>
+            </a:endParaRPr>
+          </a:p>
+        </p:txBody>
+      </p:sp>
+    </p:spTree>
+    <p:extLst>
+      <p:ext uri="{BB962C8B-B14F-4D97-AF65-F5344CB8AC3E}">
+        <p14:creationId xmlns:p14="http://schemas.microsoft.com/office/powerpoint/2010/main" val="3874813796"/>
+      </p:ext>
+    </p:extLst>
+  </p:cSld>
+  <p:clrMapOvr>
+    <a:masterClrMapping/>
+  </p:clrMapOvr>
+</p:sld>
+</file>
+
 <file path=ppt/slides/slide2.xml><?xml version="1.0" encoding="utf-8"?>
 <p:sld xmlns:a="http://schemas.openxmlformats.org/drawingml/2006/main" xmlns:r="http://schemas.openxmlformats.org/officeDocument/2006/relationships" xmlns:p="http://schemas.openxmlformats.org/presentationml/2006/main">
   <p:cSld>

--- a/Lesson1/Godot入门实践蛙里奥教程内容.pptx
+++ b/Lesson1/Godot入门实践蛙里奥教程内容.pptx
@@ -18,6 +18,7 @@
     <p:sldId id="266" r:id="rId12"/>
     <p:sldId id="267" r:id="rId13"/>
     <p:sldId id="268" r:id="rId14"/>
+    <p:sldId id="269" r:id="rId15"/>
   </p:sldIdLst>
   <p:sldSz cx="12192000" cy="6858000"/>
   <p:notesSz cx="6858000" cy="9144000"/>
@@ -6790,6 +6791,298 @@
 </p:sld>
 </file>
 
+<file path=ppt/slides/slide14.xml><?xml version="1.0" encoding="utf-8"?>
+<p:sld xmlns:a="http://schemas.openxmlformats.org/drawingml/2006/main" xmlns:r="http://schemas.openxmlformats.org/officeDocument/2006/relationships" xmlns:p="http://schemas.openxmlformats.org/presentationml/2006/main">
+  <p:cSld>
+    <p:spTree>
+      <p:nvGrpSpPr>
+        <p:cNvPr id="1" name=""/>
+        <p:cNvGrpSpPr/>
+        <p:nvPr/>
+      </p:nvGrpSpPr>
+      <p:grpSpPr>
+        <a:xfrm>
+          <a:off x="0" y="0"/>
+          <a:ext cx="0" cy="0"/>
+          <a:chOff x="0" y="0"/>
+          <a:chExt cx="0" cy="0"/>
+        </a:xfrm>
+      </p:grpSpPr>
+      <p:sp>
+        <p:nvSpPr>
+          <p:cNvPr id="2" name="文本框 1">
+            <a:extLst>
+              <a:ext uri="{FF2B5EF4-FFF2-40B4-BE49-F238E27FC236}">
+                <a16:creationId xmlns:a16="http://schemas.microsoft.com/office/drawing/2014/main" id="{27C11B8D-673C-6D95-E542-C0FB6B245A95}"/>
+              </a:ext>
+            </a:extLst>
+          </p:cNvPr>
+          <p:cNvSpPr txBox="1"/>
+          <p:nvPr/>
+        </p:nvSpPr>
+        <p:spPr>
+          <a:xfrm>
+            <a:off x="912600" y="897058"/>
+            <a:ext cx="8240278" cy="584775"/>
+          </a:xfrm>
+          <a:prstGeom prst="rect">
+            <a:avLst/>
+          </a:prstGeom>
+          <a:noFill/>
+        </p:spPr>
+        <p:txBody>
+          <a:bodyPr wrap="square" rtlCol="0">
+            <a:spAutoFit/>
+          </a:bodyPr>
+          <a:lstStyle/>
+          <a:p>
+            <a:r>
+              <a:rPr lang="en-US" altLang="zh-CN" sz="3200" dirty="0">
+                <a:solidFill>
+                  <a:srgbClr val="92D050"/>
+                </a:solidFill>
+                <a:latin typeface="思源黑体 CN Heavy" panose="020B0A00000000000000" pitchFamily="34" charset="-122"/>
+                <a:ea typeface="思源黑体 CN Heavy" panose="020B0A00000000000000" pitchFamily="34" charset="-122"/>
+              </a:rPr>
+              <a:t>08</a:t>
+            </a:r>
+            <a:r>
+              <a:rPr lang="zh-CN" altLang="en-US" sz="3200" dirty="0">
+                <a:solidFill>
+                  <a:srgbClr val="92D050"/>
+                </a:solidFill>
+                <a:latin typeface="思源黑体 CN Heavy" panose="020B0A00000000000000" pitchFamily="34" charset="-122"/>
+                <a:ea typeface="思源黑体 CN Heavy" panose="020B0A00000000000000" pitchFamily="34" charset="-122"/>
+              </a:rPr>
+              <a:t>、设置数据保存</a:t>
+            </a:r>
+          </a:p>
+        </p:txBody>
+      </p:sp>
+      <p:sp>
+        <p:nvSpPr>
+          <p:cNvPr id="3" name="文本框 2">
+            <a:extLst>
+              <a:ext uri="{FF2B5EF4-FFF2-40B4-BE49-F238E27FC236}">
+                <a16:creationId xmlns:a16="http://schemas.microsoft.com/office/drawing/2014/main" id="{875DA5CC-B7D0-63FD-5A64-4C544ECC6362}"/>
+              </a:ext>
+            </a:extLst>
+          </p:cNvPr>
+          <p:cNvSpPr txBox="1"/>
+          <p:nvPr/>
+        </p:nvSpPr>
+        <p:spPr>
+          <a:xfrm>
+            <a:off x="912600" y="2123657"/>
+            <a:ext cx="10956846" cy="3108543"/>
+          </a:xfrm>
+          <a:prstGeom prst="rect">
+            <a:avLst/>
+          </a:prstGeom>
+          <a:noFill/>
+        </p:spPr>
+        <p:txBody>
+          <a:bodyPr wrap="square" rtlCol="0">
+            <a:spAutoFit/>
+          </a:bodyPr>
+          <a:lstStyle/>
+          <a:p>
+            <a:r>
+              <a:rPr lang="en-US" altLang="zh-CN" sz="2800" dirty="0" err="1">
+                <a:solidFill>
+                  <a:srgbClr val="FFC000"/>
+                </a:solidFill>
+                <a:latin typeface="思源黑体 CN Heavy" panose="020B0A00000000000000" pitchFamily="34" charset="-122"/>
+                <a:ea typeface="思源黑体 CN Heavy" panose="020B0A00000000000000" pitchFamily="34" charset="-122"/>
+              </a:rPr>
+              <a:t>ConfigFile</a:t>
+            </a:r>
+            <a:r>
+              <a:rPr lang="zh-CN" altLang="en-US" sz="2800" dirty="0">
+                <a:solidFill>
+                  <a:srgbClr val="FFC000"/>
+                </a:solidFill>
+                <a:latin typeface="思源黑体 CN Heavy" panose="020B0A00000000000000" pitchFamily="34" charset="-122"/>
+                <a:ea typeface="思源黑体 CN Heavy" panose="020B0A00000000000000" pitchFamily="34" charset="-122"/>
+              </a:rPr>
+              <a:t>的使用</a:t>
+            </a:r>
+            <a:endParaRPr lang="en-US" altLang="zh-CN" sz="2800" dirty="0">
+              <a:solidFill>
+                <a:srgbClr val="FFC000"/>
+              </a:solidFill>
+              <a:latin typeface="思源黑体 CN Heavy" panose="020B0A00000000000000" pitchFamily="34" charset="-122"/>
+              <a:ea typeface="思源黑体 CN Heavy" panose="020B0A00000000000000" pitchFamily="34" charset="-122"/>
+            </a:endParaRPr>
+          </a:p>
+          <a:p>
+            <a:endParaRPr lang="en-US" altLang="zh-CN" sz="2800" dirty="0">
+              <a:solidFill>
+                <a:srgbClr val="FFC000"/>
+              </a:solidFill>
+              <a:latin typeface="思源黑体 CN Heavy" panose="020B0A00000000000000" pitchFamily="34" charset="-122"/>
+              <a:ea typeface="思源黑体 CN Heavy" panose="020B0A00000000000000" pitchFamily="34" charset="-122"/>
+            </a:endParaRPr>
+          </a:p>
+          <a:p>
+            <a:r>
+              <a:rPr lang="en-US" altLang="zh-CN" sz="2800" dirty="0" err="1">
+                <a:solidFill>
+                  <a:srgbClr val="FFC000"/>
+                </a:solidFill>
+                <a:latin typeface="思源黑体 CN Heavy" panose="020B0A00000000000000" pitchFamily="34" charset="-122"/>
+                <a:ea typeface="思源黑体 CN Heavy" panose="020B0A00000000000000" pitchFamily="34" charset="-122"/>
+              </a:rPr>
+              <a:t>SetValue</a:t>
+            </a:r>
+            <a:r>
+              <a:rPr lang="en-US" altLang="zh-CN" sz="2800" dirty="0">
+                <a:solidFill>
+                  <a:srgbClr val="FFC000"/>
+                </a:solidFill>
+                <a:latin typeface="思源黑体 CN Heavy" panose="020B0A00000000000000" pitchFamily="34" charset="-122"/>
+                <a:ea typeface="思源黑体 CN Heavy" panose="020B0A00000000000000" pitchFamily="34" charset="-122"/>
+              </a:rPr>
+              <a:t>()</a:t>
+            </a:r>
+            <a:r>
+              <a:rPr lang="zh-CN" altLang="en-US" sz="2800" dirty="0">
+                <a:solidFill>
+                  <a:srgbClr val="FFC000"/>
+                </a:solidFill>
+                <a:latin typeface="思源黑体 CN Heavy" panose="020B0A00000000000000" pitchFamily="34" charset="-122"/>
+                <a:ea typeface="思源黑体 CN Heavy" panose="020B0A00000000000000" pitchFamily="34" charset="-122"/>
+              </a:rPr>
+              <a:t>、</a:t>
+            </a:r>
+            <a:r>
+              <a:rPr lang="en-US" altLang="zh-CN" sz="2800" dirty="0">
+                <a:solidFill>
+                  <a:srgbClr val="FFC000"/>
+                </a:solidFill>
+                <a:latin typeface="思源黑体 CN Heavy" panose="020B0A00000000000000" pitchFamily="34" charset="-122"/>
+                <a:ea typeface="思源黑体 CN Heavy" panose="020B0A00000000000000" pitchFamily="34" charset="-122"/>
+              </a:rPr>
+              <a:t>Save()</a:t>
+            </a:r>
+          </a:p>
+          <a:p>
+            <a:endParaRPr lang="en-US" altLang="zh-CN" sz="2800" dirty="0">
+              <a:solidFill>
+                <a:srgbClr val="FFC000"/>
+              </a:solidFill>
+              <a:latin typeface="思源黑体 CN Heavy" panose="020B0A00000000000000" pitchFamily="34" charset="-122"/>
+              <a:ea typeface="思源黑体 CN Heavy" panose="020B0A00000000000000" pitchFamily="34" charset="-122"/>
+            </a:endParaRPr>
+          </a:p>
+          <a:p>
+            <a:r>
+              <a:rPr lang="en-US" altLang="zh-CN" sz="2800" dirty="0">
+                <a:solidFill>
+                  <a:srgbClr val="FFC000"/>
+                </a:solidFill>
+                <a:latin typeface="思源黑体 CN Heavy" panose="020B0A00000000000000" pitchFamily="34" charset="-122"/>
+                <a:ea typeface="思源黑体 CN Heavy" panose="020B0A00000000000000" pitchFamily="34" charset="-122"/>
+              </a:rPr>
+              <a:t>Load()</a:t>
+            </a:r>
+            <a:r>
+              <a:rPr lang="zh-CN" altLang="en-US" sz="2800" dirty="0">
+                <a:solidFill>
+                  <a:srgbClr val="FFC000"/>
+                </a:solidFill>
+                <a:latin typeface="思源黑体 CN Heavy" panose="020B0A00000000000000" pitchFamily="34" charset="-122"/>
+                <a:ea typeface="思源黑体 CN Heavy" panose="020B0A00000000000000" pitchFamily="34" charset="-122"/>
+              </a:rPr>
+              <a:t>、</a:t>
+            </a:r>
+            <a:r>
+              <a:rPr lang="en-US" altLang="zh-CN" sz="2800" dirty="0" err="1">
+                <a:solidFill>
+                  <a:srgbClr val="FFC000"/>
+                </a:solidFill>
+                <a:latin typeface="思源黑体 CN Heavy" panose="020B0A00000000000000" pitchFamily="34" charset="-122"/>
+                <a:ea typeface="思源黑体 CN Heavy" panose="020B0A00000000000000" pitchFamily="34" charset="-122"/>
+              </a:rPr>
+              <a:t>GetValue</a:t>
+            </a:r>
+            <a:r>
+              <a:rPr lang="en-US" altLang="zh-CN" sz="2800" dirty="0">
+                <a:solidFill>
+                  <a:srgbClr val="FFC000"/>
+                </a:solidFill>
+                <a:latin typeface="思源黑体 CN Heavy" panose="020B0A00000000000000" pitchFamily="34" charset="-122"/>
+                <a:ea typeface="思源黑体 CN Heavy" panose="020B0A00000000000000" pitchFamily="34" charset="-122"/>
+              </a:rPr>
+              <a:t>()</a:t>
+            </a:r>
+          </a:p>
+          <a:p>
+            <a:endParaRPr lang="en-US" altLang="zh-CN" sz="2800" dirty="0">
+              <a:solidFill>
+                <a:srgbClr val="FFC000"/>
+              </a:solidFill>
+              <a:latin typeface="思源黑体 CN Heavy" panose="020B0A00000000000000" pitchFamily="34" charset="-122"/>
+              <a:ea typeface="思源黑体 CN Heavy" panose="020B0A00000000000000" pitchFamily="34" charset="-122"/>
+            </a:endParaRPr>
+          </a:p>
+          <a:p>
+            <a:r>
+              <a:rPr lang="zh-CN" altLang="en-US" sz="2800" dirty="0">
+                <a:solidFill>
+                  <a:srgbClr val="FFC000"/>
+                </a:solidFill>
+                <a:latin typeface="思源黑体 CN Heavy" panose="020B0A00000000000000" pitchFamily="34" charset="-122"/>
+                <a:ea typeface="思源黑体 CN Heavy" panose="020B0A00000000000000" pitchFamily="34" charset="-122"/>
+              </a:rPr>
+              <a:t>本地存储数据使用</a:t>
+            </a:r>
+            <a:r>
+              <a:rPr lang="en-US" altLang="zh-CN" sz="2800" dirty="0">
+                <a:solidFill>
+                  <a:srgbClr val="FFC000"/>
+                </a:solidFill>
+                <a:latin typeface="思源黑体 CN Heavy" panose="020B0A00000000000000" pitchFamily="34" charset="-122"/>
+                <a:ea typeface="思源黑体 CN Heavy" panose="020B0A00000000000000" pitchFamily="34" charset="-122"/>
+              </a:rPr>
+              <a:t>user://</a:t>
+            </a:r>
+            <a:r>
+              <a:rPr lang="zh-CN" altLang="en-US" sz="2800" dirty="0">
+                <a:solidFill>
+                  <a:srgbClr val="FFC000"/>
+                </a:solidFill>
+                <a:latin typeface="思源黑体 CN Heavy" panose="020B0A00000000000000" pitchFamily="34" charset="-122"/>
+                <a:ea typeface="思源黑体 CN Heavy" panose="020B0A00000000000000" pitchFamily="34" charset="-122"/>
+              </a:rPr>
+              <a:t>地址进行存储，不使用</a:t>
+            </a:r>
+            <a:r>
+              <a:rPr lang="en-US" altLang="zh-CN" sz="2800" dirty="0">
+                <a:solidFill>
+                  <a:srgbClr val="FFC000"/>
+                </a:solidFill>
+                <a:latin typeface="思源黑体 CN Heavy" panose="020B0A00000000000000" pitchFamily="34" charset="-122"/>
+                <a:ea typeface="思源黑体 CN Heavy" panose="020B0A00000000000000" pitchFamily="34" charset="-122"/>
+              </a:rPr>
+              <a:t>res://</a:t>
+            </a:r>
+          </a:p>
+        </p:txBody>
+      </p:sp>
+    </p:spTree>
+    <p:extLst>
+      <p:ext uri="{BB962C8B-B14F-4D97-AF65-F5344CB8AC3E}">
+        <p14:creationId xmlns:p14="http://schemas.microsoft.com/office/powerpoint/2010/main" val="1621535908"/>
+      </p:ext>
+    </p:extLst>
+  </p:cSld>
+  <p:clrMapOvr>
+    <a:masterClrMapping/>
+  </p:clrMapOvr>
+</p:sld>
+</file>
+
 <file path=ppt/slides/slide2.xml><?xml version="1.0" encoding="utf-8"?>
 <p:sld xmlns:a="http://schemas.openxmlformats.org/drawingml/2006/main" xmlns:r="http://schemas.openxmlformats.org/officeDocument/2006/relationships" xmlns:p="http://schemas.openxmlformats.org/presentationml/2006/main">
   <p:cSld>

--- a/Lesson1/Godot入门实践蛙里奥教程内容.pptx
+++ b/Lesson1/Godot入门实践蛙里奥教程内容.pptx
@@ -19,6 +19,7 @@
     <p:sldId id="267" r:id="rId13"/>
     <p:sldId id="268" r:id="rId14"/>
     <p:sldId id="269" r:id="rId15"/>
+    <p:sldId id="270" r:id="rId16"/>
   </p:sldIdLst>
   <p:sldSz cx="12192000" cy="6858000"/>
   <p:notesSz cx="6858000" cy="9144000"/>
@@ -338,7 +339,7 @@
           <a:p>
             <a:fld id="{9B9F07B0-025E-4E92-AC39-0EAAEC335187}" type="datetimeFigureOut">
               <a:rPr lang="zh-CN" altLang="en-US" smtClean="0"/>
-              <a:t>2026/5/8</a:t>
+              <a:t>2026/5/13</a:t>
             </a:fld>
             <a:endParaRPr lang="zh-CN" altLang="en-US"/>
           </a:p>
@@ -629,7 +630,7 @@
           <a:p>
             <a:fld id="{9B9F07B0-025E-4E92-AC39-0EAAEC335187}" type="datetimeFigureOut">
               <a:rPr lang="zh-CN" altLang="en-US" smtClean="0"/>
-              <a:t>2026/5/8</a:t>
+              <a:t>2026/5/13</a:t>
             </a:fld>
             <a:endParaRPr lang="zh-CN" altLang="en-US"/>
           </a:p>
@@ -888,7 +889,7 @@
           <a:p>
             <a:fld id="{9B9F07B0-025E-4E92-AC39-0EAAEC335187}" type="datetimeFigureOut">
               <a:rPr lang="zh-CN" altLang="en-US" smtClean="0"/>
-              <a:t>2026/5/8</a:t>
+              <a:t>2026/5/13</a:t>
             </a:fld>
             <a:endParaRPr lang="zh-CN" altLang="en-US"/>
           </a:p>
@@ -1357,7 +1358,7 @@
           <a:p>
             <a:fld id="{9B9F07B0-025E-4E92-AC39-0EAAEC335187}" type="datetimeFigureOut">
               <a:rPr lang="zh-CN" altLang="en-US" smtClean="0"/>
-              <a:t>2026/5/8</a:t>
+              <a:t>2026/5/13</a:t>
             </a:fld>
             <a:endParaRPr lang="zh-CN" altLang="en-US"/>
           </a:p>
@@ -1537,7 +1538,7 @@
           <a:p>
             <a:fld id="{9B9F07B0-025E-4E92-AC39-0EAAEC335187}" type="datetimeFigureOut">
               <a:rPr lang="zh-CN" altLang="en-US" smtClean="0"/>
-              <a:t>2026/5/8</a:t>
+              <a:t>2026/5/13</a:t>
             </a:fld>
             <a:endParaRPr lang="zh-CN" altLang="en-US"/>
           </a:p>
@@ -2113,7 +2114,7 @@
           <a:p>
             <a:fld id="{9B9F07B0-025E-4E92-AC39-0EAAEC335187}" type="datetimeFigureOut">
               <a:rPr lang="zh-CN" altLang="en-US" smtClean="0"/>
-              <a:t>2026/5/8</a:t>
+              <a:t>2026/5/13</a:t>
             </a:fld>
             <a:endParaRPr lang="zh-CN" altLang="en-US"/>
           </a:p>
@@ -2445,7 +2446,7 @@
           <a:p>
             <a:fld id="{9B9F07B0-025E-4E92-AC39-0EAAEC335187}" type="datetimeFigureOut">
               <a:rPr lang="zh-CN" altLang="en-US" smtClean="0"/>
-              <a:t>2026/5/8</a:t>
+              <a:t>2026/5/13</a:t>
             </a:fld>
             <a:endParaRPr lang="zh-CN" altLang="en-US"/>
           </a:p>
@@ -2620,7 +2621,7 @@
           <a:p>
             <a:fld id="{9B9F07B0-025E-4E92-AC39-0EAAEC335187}" type="datetimeFigureOut">
               <a:rPr lang="zh-CN" altLang="en-US" smtClean="0"/>
-              <a:t>2026/5/8</a:t>
+              <a:t>2026/5/13</a:t>
             </a:fld>
             <a:endParaRPr lang="zh-CN" altLang="en-US"/>
           </a:p>
@@ -2800,7 +2801,7 @@
           <a:p>
             <a:fld id="{9B9F07B0-025E-4E92-AC39-0EAAEC335187}" type="datetimeFigureOut">
               <a:rPr lang="zh-CN" altLang="en-US" smtClean="0"/>
-              <a:t>2026/5/8</a:t>
+              <a:t>2026/5/13</a:t>
             </a:fld>
             <a:endParaRPr lang="zh-CN" altLang="en-US"/>
           </a:p>
@@ -2970,7 +2971,7 @@
           <a:p>
             <a:fld id="{9B9F07B0-025E-4E92-AC39-0EAAEC335187}" type="datetimeFigureOut">
               <a:rPr lang="zh-CN" altLang="en-US" smtClean="0"/>
-              <a:t>2026/5/8</a:t>
+              <a:t>2026/5/13</a:t>
             </a:fld>
             <a:endParaRPr lang="zh-CN" altLang="en-US"/>
           </a:p>
@@ -3227,7 +3228,7 @@
           <a:p>
             <a:fld id="{9B9F07B0-025E-4E92-AC39-0EAAEC335187}" type="datetimeFigureOut">
               <a:rPr lang="zh-CN" altLang="en-US" smtClean="0"/>
-              <a:t>2026/5/8</a:t>
+              <a:t>2026/5/13</a:t>
             </a:fld>
             <a:endParaRPr lang="zh-CN" altLang="en-US"/>
           </a:p>
@@ -3519,7 +3520,7 @@
           <a:p>
             <a:fld id="{9B9F07B0-025E-4E92-AC39-0EAAEC335187}" type="datetimeFigureOut">
               <a:rPr lang="zh-CN" altLang="en-US" smtClean="0"/>
-              <a:t>2026/5/8</a:t>
+              <a:t>2026/5/13</a:t>
             </a:fld>
             <a:endParaRPr lang="zh-CN" altLang="en-US"/>
           </a:p>
@@ -3949,7 +3950,7 @@
           <a:p>
             <a:fld id="{9B9F07B0-025E-4E92-AC39-0EAAEC335187}" type="datetimeFigureOut">
               <a:rPr lang="zh-CN" altLang="en-US" smtClean="0"/>
-              <a:t>2026/5/8</a:t>
+              <a:t>2026/5/13</a:t>
             </a:fld>
             <a:endParaRPr lang="zh-CN" altLang="en-US"/>
           </a:p>
@@ -4067,7 +4068,7 @@
           <a:p>
             <a:fld id="{9B9F07B0-025E-4E92-AC39-0EAAEC335187}" type="datetimeFigureOut">
               <a:rPr lang="zh-CN" altLang="en-US" smtClean="0"/>
-              <a:t>2026/5/8</a:t>
+              <a:t>2026/5/13</a:t>
             </a:fld>
             <a:endParaRPr lang="zh-CN" altLang="en-US"/>
           </a:p>
@@ -4162,7 +4163,7 @@
           <a:p>
             <a:fld id="{9B9F07B0-025E-4E92-AC39-0EAAEC335187}" type="datetimeFigureOut">
               <a:rPr lang="zh-CN" altLang="en-US" smtClean="0"/>
-              <a:t>2026/5/8</a:t>
+              <a:t>2026/5/13</a:t>
             </a:fld>
             <a:endParaRPr lang="zh-CN" altLang="en-US"/>
           </a:p>
@@ -4445,7 +4446,7 @@
           <a:p>
             <a:fld id="{9B9F07B0-025E-4E92-AC39-0EAAEC335187}" type="datetimeFigureOut">
               <a:rPr lang="zh-CN" altLang="en-US" smtClean="0"/>
-              <a:t>2026/5/8</a:t>
+              <a:t>2026/5/13</a:t>
             </a:fld>
             <a:endParaRPr lang="zh-CN" altLang="en-US"/>
           </a:p>
@@ -4736,7 +4737,7 @@
           <a:p>
             <a:fld id="{9B9F07B0-025E-4E92-AC39-0EAAEC335187}" type="datetimeFigureOut">
               <a:rPr lang="zh-CN" altLang="en-US" smtClean="0"/>
-              <a:t>2026/5/8</a:t>
+              <a:t>2026/5/13</a:t>
             </a:fld>
             <a:endParaRPr lang="zh-CN" altLang="en-US"/>
           </a:p>
@@ -4967,7 +4968,7 @@
           <a:p>
             <a:fld id="{9B9F07B0-025E-4E92-AC39-0EAAEC335187}" type="datetimeFigureOut">
               <a:rPr lang="zh-CN" altLang="en-US" smtClean="0"/>
-              <a:t>2026/5/8</a:t>
+              <a:t>2026/5/13</a:t>
             </a:fld>
             <a:endParaRPr lang="zh-CN" altLang="en-US"/>
           </a:p>
@@ -7083,6 +7084,249 @@
 </p:sld>
 </file>
 
+<file path=ppt/slides/slide15.xml><?xml version="1.0" encoding="utf-8"?>
+<p:sld xmlns:a="http://schemas.openxmlformats.org/drawingml/2006/main" xmlns:r="http://schemas.openxmlformats.org/officeDocument/2006/relationships" xmlns:p="http://schemas.openxmlformats.org/presentationml/2006/main">
+  <p:cSld>
+    <p:spTree>
+      <p:nvGrpSpPr>
+        <p:cNvPr id="1" name=""/>
+        <p:cNvGrpSpPr/>
+        <p:nvPr/>
+      </p:nvGrpSpPr>
+      <p:grpSpPr>
+        <a:xfrm>
+          <a:off x="0" y="0"/>
+          <a:ext cx="0" cy="0"/>
+          <a:chOff x="0" y="0"/>
+          <a:chExt cx="0" cy="0"/>
+        </a:xfrm>
+      </p:grpSpPr>
+      <p:sp>
+        <p:nvSpPr>
+          <p:cNvPr id="2" name="文本框 1">
+            <a:extLst>
+              <a:ext uri="{FF2B5EF4-FFF2-40B4-BE49-F238E27FC236}">
+                <a16:creationId xmlns:a16="http://schemas.microsoft.com/office/drawing/2014/main" id="{65F3CB4C-57ED-BBFC-8966-CC9F954E519D}"/>
+              </a:ext>
+            </a:extLst>
+          </p:cNvPr>
+          <p:cNvSpPr txBox="1"/>
+          <p:nvPr/>
+        </p:nvSpPr>
+        <p:spPr>
+          <a:xfrm>
+            <a:off x="912600" y="897058"/>
+            <a:ext cx="8240278" cy="584775"/>
+          </a:xfrm>
+          <a:prstGeom prst="rect">
+            <a:avLst/>
+          </a:prstGeom>
+          <a:noFill/>
+        </p:spPr>
+        <p:txBody>
+          <a:bodyPr wrap="square" rtlCol="0">
+            <a:spAutoFit/>
+          </a:bodyPr>
+          <a:lstStyle/>
+          <a:p>
+            <a:r>
+              <a:rPr lang="en-US" altLang="zh-CN" sz="3200" dirty="0">
+                <a:solidFill>
+                  <a:srgbClr val="92D050"/>
+                </a:solidFill>
+                <a:latin typeface="思源黑体 CN Heavy" panose="020B0A00000000000000" pitchFamily="34" charset="-122"/>
+                <a:ea typeface="思源黑体 CN Heavy" panose="020B0A00000000000000" pitchFamily="34" charset="-122"/>
+              </a:rPr>
+              <a:t>09</a:t>
+            </a:r>
+            <a:r>
+              <a:rPr lang="zh-CN" altLang="en-US" sz="3200" dirty="0">
+                <a:solidFill>
+                  <a:srgbClr val="92D050"/>
+                </a:solidFill>
+                <a:latin typeface="思源黑体 CN Heavy" panose="020B0A00000000000000" pitchFamily="34" charset="-122"/>
+                <a:ea typeface="思源黑体 CN Heavy" panose="020B0A00000000000000" pitchFamily="34" charset="-122"/>
+              </a:rPr>
+              <a:t>、瓦片地图编辑</a:t>
+            </a:r>
+          </a:p>
+        </p:txBody>
+      </p:sp>
+      <p:sp>
+        <p:nvSpPr>
+          <p:cNvPr id="3" name="文本框 2">
+            <a:extLst>
+              <a:ext uri="{FF2B5EF4-FFF2-40B4-BE49-F238E27FC236}">
+                <a16:creationId xmlns:a16="http://schemas.microsoft.com/office/drawing/2014/main" id="{43BE741C-2E27-3C4F-3D79-35B6377251CA}"/>
+              </a:ext>
+            </a:extLst>
+          </p:cNvPr>
+          <p:cNvSpPr txBox="1"/>
+          <p:nvPr/>
+        </p:nvSpPr>
+        <p:spPr>
+          <a:xfrm>
+            <a:off x="912600" y="2123657"/>
+            <a:ext cx="10956846" cy="3108543"/>
+          </a:xfrm>
+          <a:prstGeom prst="rect">
+            <a:avLst/>
+          </a:prstGeom>
+          <a:noFill/>
+        </p:spPr>
+        <p:txBody>
+          <a:bodyPr wrap="square" rtlCol="0">
+            <a:spAutoFit/>
+          </a:bodyPr>
+          <a:lstStyle/>
+          <a:p>
+            <a:r>
+              <a:rPr lang="en-US" altLang="zh-CN" sz="2800" dirty="0" err="1">
+                <a:solidFill>
+                  <a:srgbClr val="FFC000"/>
+                </a:solidFill>
+                <a:latin typeface="思源黑体 CN Heavy" panose="020B0A00000000000000" pitchFamily="34" charset="-122"/>
+                <a:ea typeface="思源黑体 CN Heavy" panose="020B0A00000000000000" pitchFamily="34" charset="-122"/>
+              </a:rPr>
+              <a:t>TileMapLayer</a:t>
+            </a:r>
+            <a:r>
+              <a:rPr lang="zh-CN" altLang="en-US" sz="2800" dirty="0">
+                <a:solidFill>
+                  <a:srgbClr val="FFC000"/>
+                </a:solidFill>
+                <a:latin typeface="思源黑体 CN Heavy" panose="020B0A00000000000000" pitchFamily="34" charset="-122"/>
+                <a:ea typeface="思源黑体 CN Heavy" panose="020B0A00000000000000" pitchFamily="34" charset="-122"/>
+              </a:rPr>
+              <a:t>节点的使用</a:t>
+            </a:r>
+            <a:endParaRPr lang="en-US" altLang="zh-CN" sz="2800" dirty="0">
+              <a:solidFill>
+                <a:srgbClr val="FFC000"/>
+              </a:solidFill>
+              <a:latin typeface="思源黑体 CN Heavy" panose="020B0A00000000000000" pitchFamily="34" charset="-122"/>
+              <a:ea typeface="思源黑体 CN Heavy" panose="020B0A00000000000000" pitchFamily="34" charset="-122"/>
+            </a:endParaRPr>
+          </a:p>
+          <a:p>
+            <a:endParaRPr lang="en-US" altLang="zh-CN" sz="2800" dirty="0">
+              <a:solidFill>
+                <a:srgbClr val="FFC000"/>
+              </a:solidFill>
+              <a:latin typeface="思源黑体 CN Heavy" panose="020B0A00000000000000" pitchFamily="34" charset="-122"/>
+              <a:ea typeface="思源黑体 CN Heavy" panose="020B0A00000000000000" pitchFamily="34" charset="-122"/>
+            </a:endParaRPr>
+          </a:p>
+          <a:p>
+            <a:r>
+              <a:rPr lang="zh-CN" altLang="en-US" sz="2800" dirty="0">
+                <a:solidFill>
+                  <a:srgbClr val="FFC000"/>
+                </a:solidFill>
+                <a:latin typeface="思源黑体 CN Heavy" panose="020B0A00000000000000" pitchFamily="34" charset="-122"/>
+                <a:ea typeface="思源黑体 CN Heavy" panose="020B0A00000000000000" pitchFamily="34" charset="-122"/>
+              </a:rPr>
+              <a:t>新增物理层</a:t>
+            </a:r>
+            <a:endParaRPr lang="en-US" altLang="zh-CN" sz="2800" dirty="0">
+              <a:solidFill>
+                <a:srgbClr val="FFC000"/>
+              </a:solidFill>
+              <a:latin typeface="思源黑体 CN Heavy" panose="020B0A00000000000000" pitchFamily="34" charset="-122"/>
+              <a:ea typeface="思源黑体 CN Heavy" panose="020B0A00000000000000" pitchFamily="34" charset="-122"/>
+            </a:endParaRPr>
+          </a:p>
+          <a:p>
+            <a:endParaRPr lang="en-US" altLang="zh-CN" sz="2800" dirty="0">
+              <a:solidFill>
+                <a:srgbClr val="FFC000"/>
+              </a:solidFill>
+              <a:latin typeface="思源黑体 CN Heavy" panose="020B0A00000000000000" pitchFamily="34" charset="-122"/>
+              <a:ea typeface="思源黑体 CN Heavy" panose="020B0A00000000000000" pitchFamily="34" charset="-122"/>
+            </a:endParaRPr>
+          </a:p>
+          <a:p>
+            <a:r>
+              <a:rPr lang="en-US" altLang="zh-CN" sz="2800" dirty="0" err="1">
+                <a:solidFill>
+                  <a:srgbClr val="FFC000"/>
+                </a:solidFill>
+                <a:latin typeface="思源黑体 CN Heavy" panose="020B0A00000000000000" pitchFamily="34" charset="-122"/>
+                <a:ea typeface="思源黑体 CN Heavy" panose="020B0A00000000000000" pitchFamily="34" charset="-122"/>
+              </a:rPr>
+              <a:t>TileSet</a:t>
+            </a:r>
+            <a:r>
+              <a:rPr lang="zh-CN" altLang="en-US" sz="2800" dirty="0">
+                <a:solidFill>
+                  <a:srgbClr val="FFC000"/>
+                </a:solidFill>
+                <a:latin typeface="思源黑体 CN Heavy" panose="020B0A00000000000000" pitchFamily="34" charset="-122"/>
+                <a:ea typeface="思源黑体 CN Heavy" panose="020B0A00000000000000" pitchFamily="34" charset="-122"/>
+              </a:rPr>
+              <a:t>面板设置碰撞面积</a:t>
+            </a:r>
+            <a:endParaRPr lang="en-US" altLang="zh-CN" sz="2800" dirty="0">
+              <a:solidFill>
+                <a:srgbClr val="FFC000"/>
+              </a:solidFill>
+              <a:latin typeface="思源黑体 CN Heavy" panose="020B0A00000000000000" pitchFamily="34" charset="-122"/>
+              <a:ea typeface="思源黑体 CN Heavy" panose="020B0A00000000000000" pitchFamily="34" charset="-122"/>
+            </a:endParaRPr>
+          </a:p>
+          <a:p>
+            <a:endParaRPr lang="en-US" altLang="zh-CN" sz="2800" dirty="0">
+              <a:solidFill>
+                <a:srgbClr val="FFC000"/>
+              </a:solidFill>
+              <a:latin typeface="思源黑体 CN Heavy" panose="020B0A00000000000000" pitchFamily="34" charset="-122"/>
+              <a:ea typeface="思源黑体 CN Heavy" panose="020B0A00000000000000" pitchFamily="34" charset="-122"/>
+            </a:endParaRPr>
+          </a:p>
+          <a:p>
+            <a:r>
+              <a:rPr lang="en-US" altLang="zh-CN" sz="2800" dirty="0" err="1">
+                <a:solidFill>
+                  <a:srgbClr val="FFC000"/>
+                </a:solidFill>
+                <a:latin typeface="思源黑体 CN Heavy" panose="020B0A00000000000000" pitchFamily="34" charset="-122"/>
+                <a:ea typeface="思源黑体 CN Heavy" panose="020B0A00000000000000" pitchFamily="34" charset="-122"/>
+              </a:rPr>
+              <a:t>TileMap</a:t>
+            </a:r>
+            <a:r>
+              <a:rPr lang="zh-CN" altLang="en-US" sz="2800" dirty="0">
+                <a:solidFill>
+                  <a:srgbClr val="FFC000"/>
+                </a:solidFill>
+                <a:latin typeface="思源黑体 CN Heavy" panose="020B0A00000000000000" pitchFamily="34" charset="-122"/>
+                <a:ea typeface="思源黑体 CN Heavy" panose="020B0A00000000000000" pitchFamily="34" charset="-122"/>
+              </a:rPr>
+              <a:t>面板布置瓦片地图</a:t>
+            </a:r>
+            <a:endParaRPr lang="en-US" altLang="zh-CN" sz="2800" dirty="0">
+              <a:solidFill>
+                <a:srgbClr val="FFC000"/>
+              </a:solidFill>
+              <a:latin typeface="思源黑体 CN Heavy" panose="020B0A00000000000000" pitchFamily="34" charset="-122"/>
+              <a:ea typeface="思源黑体 CN Heavy" panose="020B0A00000000000000" pitchFamily="34" charset="-122"/>
+            </a:endParaRPr>
+          </a:p>
+        </p:txBody>
+      </p:sp>
+    </p:spTree>
+    <p:extLst>
+      <p:ext uri="{BB962C8B-B14F-4D97-AF65-F5344CB8AC3E}">
+        <p14:creationId xmlns:p14="http://schemas.microsoft.com/office/powerpoint/2010/main" val="2214789536"/>
+      </p:ext>
+    </p:extLst>
+  </p:cSld>
+  <p:clrMapOvr>
+    <a:masterClrMapping/>
+  </p:clrMapOvr>
+</p:sld>
+</file>
+
 <file path=ppt/slides/slide2.xml><?xml version="1.0" encoding="utf-8"?>
 <p:sld xmlns:a="http://schemas.openxmlformats.org/drawingml/2006/main" xmlns:r="http://schemas.openxmlformats.org/officeDocument/2006/relationships" xmlns:p="http://schemas.openxmlformats.org/presentationml/2006/main">
   <p:cSld>

--- a/Lesson1/Godot入门实践蛙里奥教程内容.pptx
+++ b/Lesson1/Godot入门实践蛙里奥教程内容.pptx
@@ -20,6 +20,7 @@
     <p:sldId id="268" r:id="rId14"/>
     <p:sldId id="269" r:id="rId15"/>
     <p:sldId id="270" r:id="rId16"/>
+    <p:sldId id="271" r:id="rId17"/>
   </p:sldIdLst>
   <p:sldSz cx="12192000" cy="6858000"/>
   <p:notesSz cx="6858000" cy="9144000"/>
@@ -339,7 +340,7 @@
           <a:p>
             <a:fld id="{9B9F07B0-025E-4E92-AC39-0EAAEC335187}" type="datetimeFigureOut">
               <a:rPr lang="zh-CN" altLang="en-US" smtClean="0"/>
-              <a:t>2026/5/13</a:t>
+              <a:t>2026/5/14</a:t>
             </a:fld>
             <a:endParaRPr lang="zh-CN" altLang="en-US"/>
           </a:p>
@@ -630,7 +631,7 @@
           <a:p>
             <a:fld id="{9B9F07B0-025E-4E92-AC39-0EAAEC335187}" type="datetimeFigureOut">
               <a:rPr lang="zh-CN" altLang="en-US" smtClean="0"/>
-              <a:t>2026/5/13</a:t>
+              <a:t>2026/5/14</a:t>
             </a:fld>
             <a:endParaRPr lang="zh-CN" altLang="en-US"/>
           </a:p>
@@ -889,7 +890,7 @@
           <a:p>
             <a:fld id="{9B9F07B0-025E-4E92-AC39-0EAAEC335187}" type="datetimeFigureOut">
               <a:rPr lang="zh-CN" altLang="en-US" smtClean="0"/>
-              <a:t>2026/5/13</a:t>
+              <a:t>2026/5/14</a:t>
             </a:fld>
             <a:endParaRPr lang="zh-CN" altLang="en-US"/>
           </a:p>
@@ -1358,7 +1359,7 @@
           <a:p>
             <a:fld id="{9B9F07B0-025E-4E92-AC39-0EAAEC335187}" type="datetimeFigureOut">
               <a:rPr lang="zh-CN" altLang="en-US" smtClean="0"/>
-              <a:t>2026/5/13</a:t>
+              <a:t>2026/5/14</a:t>
             </a:fld>
             <a:endParaRPr lang="zh-CN" altLang="en-US"/>
           </a:p>
@@ -1538,7 +1539,7 @@
           <a:p>
             <a:fld id="{9B9F07B0-025E-4E92-AC39-0EAAEC335187}" type="datetimeFigureOut">
               <a:rPr lang="zh-CN" altLang="en-US" smtClean="0"/>
-              <a:t>2026/5/13</a:t>
+              <a:t>2026/5/14</a:t>
             </a:fld>
             <a:endParaRPr lang="zh-CN" altLang="en-US"/>
           </a:p>
@@ -2114,7 +2115,7 @@
           <a:p>
             <a:fld id="{9B9F07B0-025E-4E92-AC39-0EAAEC335187}" type="datetimeFigureOut">
               <a:rPr lang="zh-CN" altLang="en-US" smtClean="0"/>
-              <a:t>2026/5/13</a:t>
+              <a:t>2026/5/14</a:t>
             </a:fld>
             <a:endParaRPr lang="zh-CN" altLang="en-US"/>
           </a:p>
@@ -2446,7 +2447,7 @@
           <a:p>
             <a:fld id="{9B9F07B0-025E-4E92-AC39-0EAAEC335187}" type="datetimeFigureOut">
               <a:rPr lang="zh-CN" altLang="en-US" smtClean="0"/>
-              <a:t>2026/5/13</a:t>
+              <a:t>2026/5/14</a:t>
             </a:fld>
             <a:endParaRPr lang="zh-CN" altLang="en-US"/>
           </a:p>
@@ -2621,7 +2622,7 @@
           <a:p>
             <a:fld id="{9B9F07B0-025E-4E92-AC39-0EAAEC335187}" type="datetimeFigureOut">
               <a:rPr lang="zh-CN" altLang="en-US" smtClean="0"/>
-              <a:t>2026/5/13</a:t>
+              <a:t>2026/5/14</a:t>
             </a:fld>
             <a:endParaRPr lang="zh-CN" altLang="en-US"/>
           </a:p>
@@ -2801,7 +2802,7 @@
           <a:p>
             <a:fld id="{9B9F07B0-025E-4E92-AC39-0EAAEC335187}" type="datetimeFigureOut">
               <a:rPr lang="zh-CN" altLang="en-US" smtClean="0"/>
-              <a:t>2026/5/13</a:t>
+              <a:t>2026/5/14</a:t>
             </a:fld>
             <a:endParaRPr lang="zh-CN" altLang="en-US"/>
           </a:p>
@@ -2971,7 +2972,7 @@
           <a:p>
             <a:fld id="{9B9F07B0-025E-4E92-AC39-0EAAEC335187}" type="datetimeFigureOut">
               <a:rPr lang="zh-CN" altLang="en-US" smtClean="0"/>
-              <a:t>2026/5/13</a:t>
+              <a:t>2026/5/14</a:t>
             </a:fld>
             <a:endParaRPr lang="zh-CN" altLang="en-US"/>
           </a:p>
@@ -3228,7 +3229,7 @@
           <a:p>
             <a:fld id="{9B9F07B0-025E-4E92-AC39-0EAAEC335187}" type="datetimeFigureOut">
               <a:rPr lang="zh-CN" altLang="en-US" smtClean="0"/>
-              <a:t>2026/5/13</a:t>
+              <a:t>2026/5/14</a:t>
             </a:fld>
             <a:endParaRPr lang="zh-CN" altLang="en-US"/>
           </a:p>
@@ -3520,7 +3521,7 @@
           <a:p>
             <a:fld id="{9B9F07B0-025E-4E92-AC39-0EAAEC335187}" type="datetimeFigureOut">
               <a:rPr lang="zh-CN" altLang="en-US" smtClean="0"/>
-              <a:t>2026/5/13</a:t>
+              <a:t>2026/5/14</a:t>
             </a:fld>
             <a:endParaRPr lang="zh-CN" altLang="en-US"/>
           </a:p>
@@ -3950,7 +3951,7 @@
           <a:p>
             <a:fld id="{9B9F07B0-025E-4E92-AC39-0EAAEC335187}" type="datetimeFigureOut">
               <a:rPr lang="zh-CN" altLang="en-US" smtClean="0"/>
-              <a:t>2026/5/13</a:t>
+              <a:t>2026/5/14</a:t>
             </a:fld>
             <a:endParaRPr lang="zh-CN" altLang="en-US"/>
           </a:p>
@@ -4068,7 +4069,7 @@
           <a:p>
             <a:fld id="{9B9F07B0-025E-4E92-AC39-0EAAEC335187}" type="datetimeFigureOut">
               <a:rPr lang="zh-CN" altLang="en-US" smtClean="0"/>
-              <a:t>2026/5/13</a:t>
+              <a:t>2026/5/14</a:t>
             </a:fld>
             <a:endParaRPr lang="zh-CN" altLang="en-US"/>
           </a:p>
@@ -4163,7 +4164,7 @@
           <a:p>
             <a:fld id="{9B9F07B0-025E-4E92-AC39-0EAAEC335187}" type="datetimeFigureOut">
               <a:rPr lang="zh-CN" altLang="en-US" smtClean="0"/>
-              <a:t>2026/5/13</a:t>
+              <a:t>2026/5/14</a:t>
             </a:fld>
             <a:endParaRPr lang="zh-CN" altLang="en-US"/>
           </a:p>
@@ -4446,7 +4447,7 @@
           <a:p>
             <a:fld id="{9B9F07B0-025E-4E92-AC39-0EAAEC335187}" type="datetimeFigureOut">
               <a:rPr lang="zh-CN" altLang="en-US" smtClean="0"/>
-              <a:t>2026/5/13</a:t>
+              <a:t>2026/5/14</a:t>
             </a:fld>
             <a:endParaRPr lang="zh-CN" altLang="en-US"/>
           </a:p>
@@ -4737,7 +4738,7 @@
           <a:p>
             <a:fld id="{9B9F07B0-025E-4E92-AC39-0EAAEC335187}" type="datetimeFigureOut">
               <a:rPr lang="zh-CN" altLang="en-US" smtClean="0"/>
-              <a:t>2026/5/13</a:t>
+              <a:t>2026/5/14</a:t>
             </a:fld>
             <a:endParaRPr lang="zh-CN" altLang="en-US"/>
           </a:p>
@@ -4968,7 +4969,7 @@
           <a:p>
             <a:fld id="{9B9F07B0-025E-4E92-AC39-0EAAEC335187}" type="datetimeFigureOut">
               <a:rPr lang="zh-CN" altLang="en-US" smtClean="0"/>
-              <a:t>2026/5/13</a:t>
+              <a:t>2026/5/14</a:t>
             </a:fld>
             <a:endParaRPr lang="zh-CN" altLang="en-US"/>
           </a:p>
@@ -7327,6 +7328,229 @@
 </p:sld>
 </file>
 
+<file path=ppt/slides/slide16.xml><?xml version="1.0" encoding="utf-8"?>
+<p:sld xmlns:a="http://schemas.openxmlformats.org/drawingml/2006/main" xmlns:r="http://schemas.openxmlformats.org/officeDocument/2006/relationships" xmlns:p="http://schemas.openxmlformats.org/presentationml/2006/main">
+  <p:cSld>
+    <p:spTree>
+      <p:nvGrpSpPr>
+        <p:cNvPr id="1" name=""/>
+        <p:cNvGrpSpPr/>
+        <p:nvPr/>
+      </p:nvGrpSpPr>
+      <p:grpSpPr>
+        <a:xfrm>
+          <a:off x="0" y="0"/>
+          <a:ext cx="0" cy="0"/>
+          <a:chOff x="0" y="0"/>
+          <a:chExt cx="0" cy="0"/>
+        </a:xfrm>
+      </p:grpSpPr>
+      <p:sp>
+        <p:nvSpPr>
+          <p:cNvPr id="2" name="文本框 1">
+            <a:extLst>
+              <a:ext uri="{FF2B5EF4-FFF2-40B4-BE49-F238E27FC236}">
+                <a16:creationId xmlns:a16="http://schemas.microsoft.com/office/drawing/2014/main" id="{517F9013-C224-17ED-D763-F57B54FD2640}"/>
+              </a:ext>
+            </a:extLst>
+          </p:cNvPr>
+          <p:cNvSpPr txBox="1"/>
+          <p:nvPr/>
+        </p:nvSpPr>
+        <p:spPr>
+          <a:xfrm>
+            <a:off x="912600" y="897058"/>
+            <a:ext cx="8240278" cy="584775"/>
+          </a:xfrm>
+          <a:prstGeom prst="rect">
+            <a:avLst/>
+          </a:prstGeom>
+          <a:noFill/>
+        </p:spPr>
+        <p:txBody>
+          <a:bodyPr wrap="square" rtlCol="0">
+            <a:spAutoFit/>
+          </a:bodyPr>
+          <a:lstStyle/>
+          <a:p>
+            <a:r>
+              <a:rPr lang="en-US" altLang="zh-CN" sz="3200" dirty="0">
+                <a:solidFill>
+                  <a:srgbClr val="92D050"/>
+                </a:solidFill>
+                <a:latin typeface="思源黑体 CN Heavy" panose="020B0A00000000000000" pitchFamily="34" charset="-122"/>
+                <a:ea typeface="思源黑体 CN Heavy" panose="020B0A00000000000000" pitchFamily="34" charset="-122"/>
+              </a:rPr>
+              <a:t>10</a:t>
+            </a:r>
+            <a:r>
+              <a:rPr lang="zh-CN" altLang="en-US" sz="3200" dirty="0">
+                <a:solidFill>
+                  <a:srgbClr val="92D050"/>
+                </a:solidFill>
+                <a:latin typeface="思源黑体 CN Heavy" panose="020B0A00000000000000" pitchFamily="34" charset="-122"/>
+                <a:ea typeface="思源黑体 CN Heavy" panose="020B0A00000000000000" pitchFamily="34" charset="-122"/>
+              </a:rPr>
+              <a:t>、角色制作</a:t>
+            </a:r>
+          </a:p>
+        </p:txBody>
+      </p:sp>
+      <p:sp>
+        <p:nvSpPr>
+          <p:cNvPr id="3" name="文本框 2">
+            <a:extLst>
+              <a:ext uri="{FF2B5EF4-FFF2-40B4-BE49-F238E27FC236}">
+                <a16:creationId xmlns:a16="http://schemas.microsoft.com/office/drawing/2014/main" id="{0CA1119B-7394-EDA0-F3DB-FD866AE9EAAD}"/>
+              </a:ext>
+            </a:extLst>
+          </p:cNvPr>
+          <p:cNvSpPr txBox="1"/>
+          <p:nvPr/>
+        </p:nvSpPr>
+        <p:spPr>
+          <a:xfrm>
+            <a:off x="912600" y="2123657"/>
+            <a:ext cx="10956846" cy="3108543"/>
+          </a:xfrm>
+          <a:prstGeom prst="rect">
+            <a:avLst/>
+          </a:prstGeom>
+          <a:noFill/>
+        </p:spPr>
+        <p:txBody>
+          <a:bodyPr wrap="square" rtlCol="0">
+            <a:spAutoFit/>
+          </a:bodyPr>
+          <a:lstStyle/>
+          <a:p>
+            <a:r>
+              <a:rPr lang="en-US" altLang="zh-CN" sz="2800" dirty="0">
+                <a:solidFill>
+                  <a:srgbClr val="FFC000"/>
+                </a:solidFill>
+                <a:latin typeface="思源黑体 CN Heavy" panose="020B0A00000000000000" pitchFamily="34" charset="-122"/>
+                <a:ea typeface="思源黑体 CN Heavy" panose="020B0A00000000000000" pitchFamily="34" charset="-122"/>
+              </a:rPr>
+              <a:t>CharacterBody2D</a:t>
+            </a:r>
+            <a:r>
+              <a:rPr lang="zh-CN" altLang="en-US" sz="2800" dirty="0">
+                <a:solidFill>
+                  <a:srgbClr val="FFC000"/>
+                </a:solidFill>
+                <a:latin typeface="思源黑体 CN Heavy" panose="020B0A00000000000000" pitchFamily="34" charset="-122"/>
+                <a:ea typeface="思源黑体 CN Heavy" panose="020B0A00000000000000" pitchFamily="34" charset="-122"/>
+              </a:rPr>
+              <a:t>节点的使用</a:t>
+            </a:r>
+            <a:endParaRPr lang="en-US" altLang="zh-CN" sz="2800" dirty="0">
+              <a:solidFill>
+                <a:srgbClr val="FFC000"/>
+              </a:solidFill>
+              <a:latin typeface="思源黑体 CN Heavy" panose="020B0A00000000000000" pitchFamily="34" charset="-122"/>
+              <a:ea typeface="思源黑体 CN Heavy" panose="020B0A00000000000000" pitchFamily="34" charset="-122"/>
+            </a:endParaRPr>
+          </a:p>
+          <a:p>
+            <a:endParaRPr lang="en-US" altLang="zh-CN" sz="2800" dirty="0">
+              <a:solidFill>
+                <a:srgbClr val="FFC000"/>
+              </a:solidFill>
+              <a:latin typeface="思源黑体 CN Heavy" panose="020B0A00000000000000" pitchFamily="34" charset="-122"/>
+              <a:ea typeface="思源黑体 CN Heavy" panose="020B0A00000000000000" pitchFamily="34" charset="-122"/>
+            </a:endParaRPr>
+          </a:p>
+          <a:p>
+            <a:r>
+              <a:rPr lang="zh-CN" altLang="en-US" sz="2800" dirty="0">
+                <a:solidFill>
+                  <a:srgbClr val="FFC000"/>
+                </a:solidFill>
+                <a:latin typeface="思源黑体 CN Heavy" panose="020B0A00000000000000" pitchFamily="34" charset="-122"/>
+                <a:ea typeface="思源黑体 CN Heavy" panose="020B0A00000000000000" pitchFamily="34" charset="-122"/>
+              </a:rPr>
+              <a:t>角色动画切换</a:t>
+            </a:r>
+            <a:endParaRPr lang="en-US" altLang="zh-CN" sz="2800" dirty="0">
+              <a:solidFill>
+                <a:srgbClr val="FFC000"/>
+              </a:solidFill>
+              <a:latin typeface="思源黑体 CN Heavy" panose="020B0A00000000000000" pitchFamily="34" charset="-122"/>
+              <a:ea typeface="思源黑体 CN Heavy" panose="020B0A00000000000000" pitchFamily="34" charset="-122"/>
+            </a:endParaRPr>
+          </a:p>
+          <a:p>
+            <a:endParaRPr lang="en-US" altLang="zh-CN" sz="2800" dirty="0">
+              <a:solidFill>
+                <a:srgbClr val="FFC000"/>
+              </a:solidFill>
+              <a:latin typeface="思源黑体 CN Heavy" panose="020B0A00000000000000" pitchFamily="34" charset="-122"/>
+              <a:ea typeface="思源黑体 CN Heavy" panose="020B0A00000000000000" pitchFamily="34" charset="-122"/>
+            </a:endParaRPr>
+          </a:p>
+          <a:p>
+            <a:r>
+              <a:rPr lang="zh-CN" altLang="en-US" sz="2800" dirty="0">
+                <a:solidFill>
+                  <a:srgbClr val="FFC000"/>
+                </a:solidFill>
+                <a:latin typeface="思源黑体 CN Heavy" panose="020B0A00000000000000" pitchFamily="34" charset="-122"/>
+                <a:ea typeface="思源黑体 CN Heavy" panose="020B0A00000000000000" pitchFamily="34" charset="-122"/>
+              </a:rPr>
+              <a:t>摄像机跟随以及最大范围</a:t>
+            </a:r>
+            <a:endParaRPr lang="en-US" altLang="zh-CN" sz="2800" dirty="0">
+              <a:solidFill>
+                <a:srgbClr val="FFC000"/>
+              </a:solidFill>
+              <a:latin typeface="思源黑体 CN Heavy" panose="020B0A00000000000000" pitchFamily="34" charset="-122"/>
+              <a:ea typeface="思源黑体 CN Heavy" panose="020B0A00000000000000" pitchFamily="34" charset="-122"/>
+            </a:endParaRPr>
+          </a:p>
+          <a:p>
+            <a:endParaRPr lang="en-US" altLang="zh-CN" sz="2800" dirty="0">
+              <a:solidFill>
+                <a:srgbClr val="FFC000"/>
+              </a:solidFill>
+              <a:latin typeface="思源黑体 CN Heavy" panose="020B0A00000000000000" pitchFamily="34" charset="-122"/>
+              <a:ea typeface="思源黑体 CN Heavy" panose="020B0A00000000000000" pitchFamily="34" charset="-122"/>
+            </a:endParaRPr>
+          </a:p>
+          <a:p>
+            <a:r>
+              <a:rPr lang="zh-CN" altLang="en-US" sz="2800" dirty="0">
+                <a:solidFill>
+                  <a:srgbClr val="FFC000"/>
+                </a:solidFill>
+                <a:latin typeface="思源黑体 CN Heavy" panose="020B0A00000000000000" pitchFamily="34" charset="-122"/>
+                <a:ea typeface="思源黑体 CN Heavy" panose="020B0A00000000000000" pitchFamily="34" charset="-122"/>
+              </a:rPr>
+              <a:t>自定义输入映射</a:t>
+            </a:r>
+            <a:endParaRPr lang="en-US" altLang="zh-CN" sz="2800" dirty="0">
+              <a:solidFill>
+                <a:srgbClr val="FFC000"/>
+              </a:solidFill>
+              <a:latin typeface="思源黑体 CN Heavy" panose="020B0A00000000000000" pitchFamily="34" charset="-122"/>
+              <a:ea typeface="思源黑体 CN Heavy" panose="020B0A00000000000000" pitchFamily="34" charset="-122"/>
+            </a:endParaRPr>
+          </a:p>
+        </p:txBody>
+      </p:sp>
+    </p:spTree>
+    <p:extLst>
+      <p:ext uri="{BB962C8B-B14F-4D97-AF65-F5344CB8AC3E}">
+        <p14:creationId xmlns:p14="http://schemas.microsoft.com/office/powerpoint/2010/main" val="1813196367"/>
+      </p:ext>
+    </p:extLst>
+  </p:cSld>
+  <p:clrMapOvr>
+    <a:masterClrMapping/>
+  </p:clrMapOvr>
+</p:sld>
+</file>
+
 <file path=ppt/slides/slide2.xml><?xml version="1.0" encoding="utf-8"?>
 <p:sld xmlns:a="http://schemas.openxmlformats.org/drawingml/2006/main" xmlns:r="http://schemas.openxmlformats.org/officeDocument/2006/relationships" xmlns:p="http://schemas.openxmlformats.org/presentationml/2006/main">
   <p:cSld>

--- a/Lesson1/Godot入门实践蛙里奥教程内容.pptx
+++ b/Lesson1/Godot入门实践蛙里奥教程内容.pptx
@@ -21,6 +21,7 @@
     <p:sldId id="269" r:id="rId15"/>
     <p:sldId id="270" r:id="rId16"/>
     <p:sldId id="271" r:id="rId17"/>
+    <p:sldId id="272" r:id="rId18"/>
   </p:sldIdLst>
   <p:sldSz cx="12192000" cy="6858000"/>
   <p:notesSz cx="6858000" cy="9144000"/>
@@ -340,7 +341,7 @@
           <a:p>
             <a:fld id="{9B9F07B0-025E-4E92-AC39-0EAAEC335187}" type="datetimeFigureOut">
               <a:rPr lang="zh-CN" altLang="en-US" smtClean="0"/>
-              <a:t>2026/5/14</a:t>
+              <a:t>2026/5/15</a:t>
             </a:fld>
             <a:endParaRPr lang="zh-CN" altLang="en-US"/>
           </a:p>
@@ -631,7 +632,7 @@
           <a:p>
             <a:fld id="{9B9F07B0-025E-4E92-AC39-0EAAEC335187}" type="datetimeFigureOut">
               <a:rPr lang="zh-CN" altLang="en-US" smtClean="0"/>
-              <a:t>2026/5/14</a:t>
+              <a:t>2026/5/15</a:t>
             </a:fld>
             <a:endParaRPr lang="zh-CN" altLang="en-US"/>
           </a:p>
@@ -890,7 +891,7 @@
           <a:p>
             <a:fld id="{9B9F07B0-025E-4E92-AC39-0EAAEC335187}" type="datetimeFigureOut">
               <a:rPr lang="zh-CN" altLang="en-US" smtClean="0"/>
-              <a:t>2026/5/14</a:t>
+              <a:t>2026/5/15</a:t>
             </a:fld>
             <a:endParaRPr lang="zh-CN" altLang="en-US"/>
           </a:p>
@@ -1359,7 +1360,7 @@
           <a:p>
             <a:fld id="{9B9F07B0-025E-4E92-AC39-0EAAEC335187}" type="datetimeFigureOut">
               <a:rPr lang="zh-CN" altLang="en-US" smtClean="0"/>
-              <a:t>2026/5/14</a:t>
+              <a:t>2026/5/15</a:t>
             </a:fld>
             <a:endParaRPr lang="zh-CN" altLang="en-US"/>
           </a:p>
@@ -1539,7 +1540,7 @@
           <a:p>
             <a:fld id="{9B9F07B0-025E-4E92-AC39-0EAAEC335187}" type="datetimeFigureOut">
               <a:rPr lang="zh-CN" altLang="en-US" smtClean="0"/>
-              <a:t>2026/5/14</a:t>
+              <a:t>2026/5/15</a:t>
             </a:fld>
             <a:endParaRPr lang="zh-CN" altLang="en-US"/>
           </a:p>
@@ -2115,7 +2116,7 @@
           <a:p>
             <a:fld id="{9B9F07B0-025E-4E92-AC39-0EAAEC335187}" type="datetimeFigureOut">
               <a:rPr lang="zh-CN" altLang="en-US" smtClean="0"/>
-              <a:t>2026/5/14</a:t>
+              <a:t>2026/5/15</a:t>
             </a:fld>
             <a:endParaRPr lang="zh-CN" altLang="en-US"/>
           </a:p>
@@ -2447,7 +2448,7 @@
           <a:p>
             <a:fld id="{9B9F07B0-025E-4E92-AC39-0EAAEC335187}" type="datetimeFigureOut">
               <a:rPr lang="zh-CN" altLang="en-US" smtClean="0"/>
-              <a:t>2026/5/14</a:t>
+              <a:t>2026/5/15</a:t>
             </a:fld>
             <a:endParaRPr lang="zh-CN" altLang="en-US"/>
           </a:p>
@@ -2622,7 +2623,7 @@
           <a:p>
             <a:fld id="{9B9F07B0-025E-4E92-AC39-0EAAEC335187}" type="datetimeFigureOut">
               <a:rPr lang="zh-CN" altLang="en-US" smtClean="0"/>
-              <a:t>2026/5/14</a:t>
+              <a:t>2026/5/15</a:t>
             </a:fld>
             <a:endParaRPr lang="zh-CN" altLang="en-US"/>
           </a:p>
@@ -2802,7 +2803,7 @@
           <a:p>
             <a:fld id="{9B9F07B0-025E-4E92-AC39-0EAAEC335187}" type="datetimeFigureOut">
               <a:rPr lang="zh-CN" altLang="en-US" smtClean="0"/>
-              <a:t>2026/5/14</a:t>
+              <a:t>2026/5/15</a:t>
             </a:fld>
             <a:endParaRPr lang="zh-CN" altLang="en-US"/>
           </a:p>
@@ -2972,7 +2973,7 @@
           <a:p>
             <a:fld id="{9B9F07B0-025E-4E92-AC39-0EAAEC335187}" type="datetimeFigureOut">
               <a:rPr lang="zh-CN" altLang="en-US" smtClean="0"/>
-              <a:t>2026/5/14</a:t>
+              <a:t>2026/5/15</a:t>
             </a:fld>
             <a:endParaRPr lang="zh-CN" altLang="en-US"/>
           </a:p>
@@ -3229,7 +3230,7 @@
           <a:p>
             <a:fld id="{9B9F07B0-025E-4E92-AC39-0EAAEC335187}" type="datetimeFigureOut">
               <a:rPr lang="zh-CN" altLang="en-US" smtClean="0"/>
-              <a:t>2026/5/14</a:t>
+              <a:t>2026/5/15</a:t>
             </a:fld>
             <a:endParaRPr lang="zh-CN" altLang="en-US"/>
           </a:p>
@@ -3521,7 +3522,7 @@
           <a:p>
             <a:fld id="{9B9F07B0-025E-4E92-AC39-0EAAEC335187}" type="datetimeFigureOut">
               <a:rPr lang="zh-CN" altLang="en-US" smtClean="0"/>
-              <a:t>2026/5/14</a:t>
+              <a:t>2026/5/15</a:t>
             </a:fld>
             <a:endParaRPr lang="zh-CN" altLang="en-US"/>
           </a:p>
@@ -3951,7 +3952,7 @@
           <a:p>
             <a:fld id="{9B9F07B0-025E-4E92-AC39-0EAAEC335187}" type="datetimeFigureOut">
               <a:rPr lang="zh-CN" altLang="en-US" smtClean="0"/>
-              <a:t>2026/5/14</a:t>
+              <a:t>2026/5/15</a:t>
             </a:fld>
             <a:endParaRPr lang="zh-CN" altLang="en-US"/>
           </a:p>
@@ -4069,7 +4070,7 @@
           <a:p>
             <a:fld id="{9B9F07B0-025E-4E92-AC39-0EAAEC335187}" type="datetimeFigureOut">
               <a:rPr lang="zh-CN" altLang="en-US" smtClean="0"/>
-              <a:t>2026/5/14</a:t>
+              <a:t>2026/5/15</a:t>
             </a:fld>
             <a:endParaRPr lang="zh-CN" altLang="en-US"/>
           </a:p>
@@ -4164,7 +4165,7 @@
           <a:p>
             <a:fld id="{9B9F07B0-025E-4E92-AC39-0EAAEC335187}" type="datetimeFigureOut">
               <a:rPr lang="zh-CN" altLang="en-US" smtClean="0"/>
-              <a:t>2026/5/14</a:t>
+              <a:t>2026/5/15</a:t>
             </a:fld>
             <a:endParaRPr lang="zh-CN" altLang="en-US"/>
           </a:p>
@@ -4447,7 +4448,7 @@
           <a:p>
             <a:fld id="{9B9F07B0-025E-4E92-AC39-0EAAEC335187}" type="datetimeFigureOut">
               <a:rPr lang="zh-CN" altLang="en-US" smtClean="0"/>
-              <a:t>2026/5/14</a:t>
+              <a:t>2026/5/15</a:t>
             </a:fld>
             <a:endParaRPr lang="zh-CN" altLang="en-US"/>
           </a:p>
@@ -4738,7 +4739,7 @@
           <a:p>
             <a:fld id="{9B9F07B0-025E-4E92-AC39-0EAAEC335187}" type="datetimeFigureOut">
               <a:rPr lang="zh-CN" altLang="en-US" smtClean="0"/>
-              <a:t>2026/5/14</a:t>
+              <a:t>2026/5/15</a:t>
             </a:fld>
             <a:endParaRPr lang="zh-CN" altLang="en-US"/>
           </a:p>
@@ -4969,7 +4970,7 @@
           <a:p>
             <a:fld id="{9B9F07B0-025E-4E92-AC39-0EAAEC335187}" type="datetimeFigureOut">
               <a:rPr lang="zh-CN" altLang="en-US" smtClean="0"/>
-              <a:t>2026/5/14</a:t>
+              <a:t>2026/5/15</a:t>
             </a:fld>
             <a:endParaRPr lang="zh-CN" altLang="en-US"/>
           </a:p>
@@ -7551,6 +7552,201 @@
 </p:sld>
 </file>
 
+<file path=ppt/slides/slide17.xml><?xml version="1.0" encoding="utf-8"?>
+<p:sld xmlns:a="http://schemas.openxmlformats.org/drawingml/2006/main" xmlns:r="http://schemas.openxmlformats.org/officeDocument/2006/relationships" xmlns:p="http://schemas.openxmlformats.org/presentationml/2006/main">
+  <p:cSld>
+    <p:spTree>
+      <p:nvGrpSpPr>
+        <p:cNvPr id="1" name=""/>
+        <p:cNvGrpSpPr/>
+        <p:nvPr/>
+      </p:nvGrpSpPr>
+      <p:grpSpPr>
+        <a:xfrm>
+          <a:off x="0" y="0"/>
+          <a:ext cx="0" cy="0"/>
+          <a:chOff x="0" y="0"/>
+          <a:chExt cx="0" cy="0"/>
+        </a:xfrm>
+      </p:grpSpPr>
+      <p:sp>
+        <p:nvSpPr>
+          <p:cNvPr id="2" name="文本框 1">
+            <a:extLst>
+              <a:ext uri="{FF2B5EF4-FFF2-40B4-BE49-F238E27FC236}">
+                <a16:creationId xmlns:a16="http://schemas.microsoft.com/office/drawing/2014/main" id="{6FE43A12-AF55-B2AD-F8B1-3BC45EB9D80E}"/>
+              </a:ext>
+            </a:extLst>
+          </p:cNvPr>
+          <p:cNvSpPr txBox="1"/>
+          <p:nvPr/>
+        </p:nvSpPr>
+        <p:spPr>
+          <a:xfrm>
+            <a:off x="912600" y="897058"/>
+            <a:ext cx="8240278" cy="584775"/>
+          </a:xfrm>
+          <a:prstGeom prst="rect">
+            <a:avLst/>
+          </a:prstGeom>
+          <a:noFill/>
+        </p:spPr>
+        <p:txBody>
+          <a:bodyPr wrap="square" rtlCol="0">
+            <a:spAutoFit/>
+          </a:bodyPr>
+          <a:lstStyle/>
+          <a:p>
+            <a:r>
+              <a:rPr lang="en-US" altLang="zh-CN" sz="3200" dirty="0">
+                <a:solidFill>
+                  <a:srgbClr val="92D050"/>
+                </a:solidFill>
+                <a:latin typeface="思源黑体 CN Heavy" panose="020B0A00000000000000" pitchFamily="34" charset="-122"/>
+                <a:ea typeface="思源黑体 CN Heavy" panose="020B0A00000000000000" pitchFamily="34" charset="-122"/>
+              </a:rPr>
+              <a:t>11</a:t>
+            </a:r>
+            <a:r>
+              <a:rPr lang="zh-CN" altLang="en-US" sz="3200" dirty="0">
+                <a:solidFill>
+                  <a:srgbClr val="92D050"/>
+                </a:solidFill>
+                <a:latin typeface="思源黑体 CN Heavy" panose="020B0A00000000000000" pitchFamily="34" charset="-122"/>
+                <a:ea typeface="思源黑体 CN Heavy" panose="020B0A00000000000000" pitchFamily="34" charset="-122"/>
+              </a:rPr>
+              <a:t>、苹果制作</a:t>
+            </a:r>
+          </a:p>
+        </p:txBody>
+      </p:sp>
+      <p:sp>
+        <p:nvSpPr>
+          <p:cNvPr id="3" name="文本框 2">
+            <a:extLst>
+              <a:ext uri="{FF2B5EF4-FFF2-40B4-BE49-F238E27FC236}">
+                <a16:creationId xmlns:a16="http://schemas.microsoft.com/office/drawing/2014/main" id="{768E5362-16E5-535A-95B2-F27611FAB9F4}"/>
+              </a:ext>
+            </a:extLst>
+          </p:cNvPr>
+          <p:cNvSpPr txBox="1"/>
+          <p:nvPr/>
+        </p:nvSpPr>
+        <p:spPr>
+          <a:xfrm>
+            <a:off x="912600" y="2123657"/>
+            <a:ext cx="10956846" cy="2246769"/>
+          </a:xfrm>
+          <a:prstGeom prst="rect">
+            <a:avLst/>
+          </a:prstGeom>
+          <a:noFill/>
+        </p:spPr>
+        <p:txBody>
+          <a:bodyPr wrap="square" rtlCol="0">
+            <a:spAutoFit/>
+          </a:bodyPr>
+          <a:lstStyle/>
+          <a:p>
+            <a:r>
+              <a:rPr lang="en-US" altLang="zh-CN" sz="2800" dirty="0">
+                <a:solidFill>
+                  <a:srgbClr val="FFC000"/>
+                </a:solidFill>
+                <a:latin typeface="思源黑体 CN Heavy" panose="020B0A00000000000000" pitchFamily="34" charset="-122"/>
+                <a:ea typeface="思源黑体 CN Heavy" panose="020B0A00000000000000" pitchFamily="34" charset="-122"/>
+              </a:rPr>
+              <a:t>Area2D</a:t>
+            </a:r>
+            <a:r>
+              <a:rPr lang="zh-CN" altLang="en-US" sz="2800" dirty="0">
+                <a:solidFill>
+                  <a:srgbClr val="FFC000"/>
+                </a:solidFill>
+                <a:latin typeface="思源黑体 CN Heavy" panose="020B0A00000000000000" pitchFamily="34" charset="-122"/>
+                <a:ea typeface="思源黑体 CN Heavy" panose="020B0A00000000000000" pitchFamily="34" charset="-122"/>
+              </a:rPr>
+              <a:t>节点的使用</a:t>
+            </a:r>
+            <a:endParaRPr lang="en-US" altLang="zh-CN" sz="2800" dirty="0">
+              <a:solidFill>
+                <a:srgbClr val="FFC000"/>
+              </a:solidFill>
+              <a:latin typeface="思源黑体 CN Heavy" panose="020B0A00000000000000" pitchFamily="34" charset="-122"/>
+              <a:ea typeface="思源黑体 CN Heavy" panose="020B0A00000000000000" pitchFamily="34" charset="-122"/>
+            </a:endParaRPr>
+          </a:p>
+          <a:p>
+            <a:endParaRPr lang="en-US" altLang="zh-CN" sz="2800" dirty="0">
+              <a:solidFill>
+                <a:srgbClr val="FFC000"/>
+              </a:solidFill>
+              <a:latin typeface="思源黑体 CN Heavy" panose="020B0A00000000000000" pitchFamily="34" charset="-122"/>
+              <a:ea typeface="思源黑体 CN Heavy" panose="020B0A00000000000000" pitchFamily="34" charset="-122"/>
+            </a:endParaRPr>
+          </a:p>
+          <a:p>
+            <a:r>
+              <a:rPr lang="zh-CN" altLang="en-US" sz="2800" dirty="0">
+                <a:solidFill>
+                  <a:srgbClr val="FFC000"/>
+                </a:solidFill>
+                <a:latin typeface="思源黑体 CN Heavy" panose="020B0A00000000000000" pitchFamily="34" charset="-122"/>
+                <a:ea typeface="思源黑体 CN Heavy" panose="020B0A00000000000000" pitchFamily="34" charset="-122"/>
+              </a:rPr>
+              <a:t>代码中如何只执行一次碰撞检测</a:t>
+            </a:r>
+            <a:endParaRPr lang="en-US" altLang="zh-CN" sz="2800" dirty="0">
+              <a:solidFill>
+                <a:srgbClr val="FFC000"/>
+              </a:solidFill>
+              <a:latin typeface="思源黑体 CN Heavy" panose="020B0A00000000000000" pitchFamily="34" charset="-122"/>
+              <a:ea typeface="思源黑体 CN Heavy" panose="020B0A00000000000000" pitchFamily="34" charset="-122"/>
+            </a:endParaRPr>
+          </a:p>
+          <a:p>
+            <a:endParaRPr lang="en-US" altLang="zh-CN" sz="2800" dirty="0">
+              <a:solidFill>
+                <a:srgbClr val="FFC000"/>
+              </a:solidFill>
+              <a:latin typeface="思源黑体 CN Heavy" panose="020B0A00000000000000" pitchFamily="34" charset="-122"/>
+              <a:ea typeface="思源黑体 CN Heavy" panose="020B0A00000000000000" pitchFamily="34" charset="-122"/>
+            </a:endParaRPr>
+          </a:p>
+          <a:p>
+            <a:r>
+              <a:rPr lang="zh-CN" altLang="en-US" sz="2800">
+                <a:solidFill>
+                  <a:srgbClr val="FFC000"/>
+                </a:solidFill>
+                <a:latin typeface="思源黑体 CN Heavy" panose="020B0A00000000000000" pitchFamily="34" charset="-122"/>
+                <a:ea typeface="思源黑体 CN Heavy" panose="020B0A00000000000000" pitchFamily="34" charset="-122"/>
+              </a:rPr>
+              <a:t>动画结束后执行代码</a:t>
+            </a:r>
+            <a:endParaRPr lang="en-US" altLang="zh-CN" sz="2800" dirty="0">
+              <a:solidFill>
+                <a:srgbClr val="FFC000"/>
+              </a:solidFill>
+              <a:latin typeface="思源黑体 CN Heavy" panose="020B0A00000000000000" pitchFamily="34" charset="-122"/>
+              <a:ea typeface="思源黑体 CN Heavy" panose="020B0A00000000000000" pitchFamily="34" charset="-122"/>
+            </a:endParaRPr>
+          </a:p>
+        </p:txBody>
+      </p:sp>
+    </p:spTree>
+    <p:extLst>
+      <p:ext uri="{BB962C8B-B14F-4D97-AF65-F5344CB8AC3E}">
+        <p14:creationId xmlns:p14="http://schemas.microsoft.com/office/powerpoint/2010/main" val="1150572874"/>
+      </p:ext>
+    </p:extLst>
+  </p:cSld>
+  <p:clrMapOvr>
+    <a:masterClrMapping/>
+  </p:clrMapOvr>
+</p:sld>
+</file>
+
 <file path=ppt/slides/slide2.xml><?xml version="1.0" encoding="utf-8"?>
 <p:sld xmlns:a="http://schemas.openxmlformats.org/drawingml/2006/main" xmlns:r="http://schemas.openxmlformats.org/officeDocument/2006/relationships" xmlns:p="http://schemas.openxmlformats.org/presentationml/2006/main">
   <p:cSld>

--- a/Lesson1/Godot入门实践蛙里奥教程内容.pptx
+++ b/Lesson1/Godot入门实践蛙里奥教程内容.pptx
@@ -22,6 +22,7 @@
     <p:sldId id="270" r:id="rId16"/>
     <p:sldId id="271" r:id="rId17"/>
     <p:sldId id="272" r:id="rId18"/>
+    <p:sldId id="273" r:id="rId19"/>
   </p:sldIdLst>
   <p:sldSz cx="12192000" cy="6858000"/>
   <p:notesSz cx="6858000" cy="9144000"/>
@@ -341,7 +342,7 @@
           <a:p>
             <a:fld id="{9B9F07B0-025E-4E92-AC39-0EAAEC335187}" type="datetimeFigureOut">
               <a:rPr lang="zh-CN" altLang="en-US" smtClean="0"/>
-              <a:t>2026/5/15</a:t>
+              <a:t>2026/5/18</a:t>
             </a:fld>
             <a:endParaRPr lang="zh-CN" altLang="en-US"/>
           </a:p>
@@ -632,7 +633,7 @@
           <a:p>
             <a:fld id="{9B9F07B0-025E-4E92-AC39-0EAAEC335187}" type="datetimeFigureOut">
               <a:rPr lang="zh-CN" altLang="en-US" smtClean="0"/>
-              <a:t>2026/5/15</a:t>
+              <a:t>2026/5/18</a:t>
             </a:fld>
             <a:endParaRPr lang="zh-CN" altLang="en-US"/>
           </a:p>
@@ -891,7 +892,7 @@
           <a:p>
             <a:fld id="{9B9F07B0-025E-4E92-AC39-0EAAEC335187}" type="datetimeFigureOut">
               <a:rPr lang="zh-CN" altLang="en-US" smtClean="0"/>
-              <a:t>2026/5/15</a:t>
+              <a:t>2026/5/18</a:t>
             </a:fld>
             <a:endParaRPr lang="zh-CN" altLang="en-US"/>
           </a:p>
@@ -1360,7 +1361,7 @@
           <a:p>
             <a:fld id="{9B9F07B0-025E-4E92-AC39-0EAAEC335187}" type="datetimeFigureOut">
               <a:rPr lang="zh-CN" altLang="en-US" smtClean="0"/>
-              <a:t>2026/5/15</a:t>
+              <a:t>2026/5/18</a:t>
             </a:fld>
             <a:endParaRPr lang="zh-CN" altLang="en-US"/>
           </a:p>
@@ -1540,7 +1541,7 @@
           <a:p>
             <a:fld id="{9B9F07B0-025E-4E92-AC39-0EAAEC335187}" type="datetimeFigureOut">
               <a:rPr lang="zh-CN" altLang="en-US" smtClean="0"/>
-              <a:t>2026/5/15</a:t>
+              <a:t>2026/5/18</a:t>
             </a:fld>
             <a:endParaRPr lang="zh-CN" altLang="en-US"/>
           </a:p>
@@ -2116,7 +2117,7 @@
           <a:p>
             <a:fld id="{9B9F07B0-025E-4E92-AC39-0EAAEC335187}" type="datetimeFigureOut">
               <a:rPr lang="zh-CN" altLang="en-US" smtClean="0"/>
-              <a:t>2026/5/15</a:t>
+              <a:t>2026/5/18</a:t>
             </a:fld>
             <a:endParaRPr lang="zh-CN" altLang="en-US"/>
           </a:p>
@@ -2448,7 +2449,7 @@
           <a:p>
             <a:fld id="{9B9F07B0-025E-4E92-AC39-0EAAEC335187}" type="datetimeFigureOut">
               <a:rPr lang="zh-CN" altLang="en-US" smtClean="0"/>
-              <a:t>2026/5/15</a:t>
+              <a:t>2026/5/18</a:t>
             </a:fld>
             <a:endParaRPr lang="zh-CN" altLang="en-US"/>
           </a:p>
@@ -2623,7 +2624,7 @@
           <a:p>
             <a:fld id="{9B9F07B0-025E-4E92-AC39-0EAAEC335187}" type="datetimeFigureOut">
               <a:rPr lang="zh-CN" altLang="en-US" smtClean="0"/>
-              <a:t>2026/5/15</a:t>
+              <a:t>2026/5/18</a:t>
             </a:fld>
             <a:endParaRPr lang="zh-CN" altLang="en-US"/>
           </a:p>
@@ -2803,7 +2804,7 @@
           <a:p>
             <a:fld id="{9B9F07B0-025E-4E92-AC39-0EAAEC335187}" type="datetimeFigureOut">
               <a:rPr lang="zh-CN" altLang="en-US" smtClean="0"/>
-              <a:t>2026/5/15</a:t>
+              <a:t>2026/5/18</a:t>
             </a:fld>
             <a:endParaRPr lang="zh-CN" altLang="en-US"/>
           </a:p>
@@ -2973,7 +2974,7 @@
           <a:p>
             <a:fld id="{9B9F07B0-025E-4E92-AC39-0EAAEC335187}" type="datetimeFigureOut">
               <a:rPr lang="zh-CN" altLang="en-US" smtClean="0"/>
-              <a:t>2026/5/15</a:t>
+              <a:t>2026/5/18</a:t>
             </a:fld>
             <a:endParaRPr lang="zh-CN" altLang="en-US"/>
           </a:p>
@@ -3230,7 +3231,7 @@
           <a:p>
             <a:fld id="{9B9F07B0-025E-4E92-AC39-0EAAEC335187}" type="datetimeFigureOut">
               <a:rPr lang="zh-CN" altLang="en-US" smtClean="0"/>
-              <a:t>2026/5/15</a:t>
+              <a:t>2026/5/18</a:t>
             </a:fld>
             <a:endParaRPr lang="zh-CN" altLang="en-US"/>
           </a:p>
@@ -3522,7 +3523,7 @@
           <a:p>
             <a:fld id="{9B9F07B0-025E-4E92-AC39-0EAAEC335187}" type="datetimeFigureOut">
               <a:rPr lang="zh-CN" altLang="en-US" smtClean="0"/>
-              <a:t>2026/5/15</a:t>
+              <a:t>2026/5/18</a:t>
             </a:fld>
             <a:endParaRPr lang="zh-CN" altLang="en-US"/>
           </a:p>
@@ -3952,7 +3953,7 @@
           <a:p>
             <a:fld id="{9B9F07B0-025E-4E92-AC39-0EAAEC335187}" type="datetimeFigureOut">
               <a:rPr lang="zh-CN" altLang="en-US" smtClean="0"/>
-              <a:t>2026/5/15</a:t>
+              <a:t>2026/5/18</a:t>
             </a:fld>
             <a:endParaRPr lang="zh-CN" altLang="en-US"/>
           </a:p>
@@ -4070,7 +4071,7 @@
           <a:p>
             <a:fld id="{9B9F07B0-025E-4E92-AC39-0EAAEC335187}" type="datetimeFigureOut">
               <a:rPr lang="zh-CN" altLang="en-US" smtClean="0"/>
-              <a:t>2026/5/15</a:t>
+              <a:t>2026/5/18</a:t>
             </a:fld>
             <a:endParaRPr lang="zh-CN" altLang="en-US"/>
           </a:p>
@@ -4165,7 +4166,7 @@
           <a:p>
             <a:fld id="{9B9F07B0-025E-4E92-AC39-0EAAEC335187}" type="datetimeFigureOut">
               <a:rPr lang="zh-CN" altLang="en-US" smtClean="0"/>
-              <a:t>2026/5/15</a:t>
+              <a:t>2026/5/18</a:t>
             </a:fld>
             <a:endParaRPr lang="zh-CN" altLang="en-US"/>
           </a:p>
@@ -4448,7 +4449,7 @@
           <a:p>
             <a:fld id="{9B9F07B0-025E-4E92-AC39-0EAAEC335187}" type="datetimeFigureOut">
               <a:rPr lang="zh-CN" altLang="en-US" smtClean="0"/>
-              <a:t>2026/5/15</a:t>
+              <a:t>2026/5/18</a:t>
             </a:fld>
             <a:endParaRPr lang="zh-CN" altLang="en-US"/>
           </a:p>
@@ -4739,7 +4740,7 @@
           <a:p>
             <a:fld id="{9B9F07B0-025E-4E92-AC39-0EAAEC335187}" type="datetimeFigureOut">
               <a:rPr lang="zh-CN" altLang="en-US" smtClean="0"/>
-              <a:t>2026/5/15</a:t>
+              <a:t>2026/5/18</a:t>
             </a:fld>
             <a:endParaRPr lang="zh-CN" altLang="en-US"/>
           </a:p>
@@ -4970,7 +4971,7 @@
           <a:p>
             <a:fld id="{9B9F07B0-025E-4E92-AC39-0EAAEC335187}" type="datetimeFigureOut">
               <a:rPr lang="zh-CN" altLang="en-US" smtClean="0"/>
-              <a:t>2026/5/15</a:t>
+              <a:t>2026/5/18</a:t>
             </a:fld>
             <a:endParaRPr lang="zh-CN" altLang="en-US"/>
           </a:p>
@@ -7715,7 +7716,7 @@
           </a:p>
           <a:p>
             <a:r>
-              <a:rPr lang="zh-CN" altLang="en-US" sz="2800">
+              <a:rPr lang="zh-CN" altLang="en-US" sz="2800" dirty="0">
                 <a:solidFill>
                   <a:srgbClr val="FFC000"/>
                 </a:solidFill>
@@ -7738,6 +7739,145 @@
     <p:extLst>
       <p:ext uri="{BB962C8B-B14F-4D97-AF65-F5344CB8AC3E}">
         <p14:creationId xmlns:p14="http://schemas.microsoft.com/office/powerpoint/2010/main" val="1150572874"/>
+      </p:ext>
+    </p:extLst>
+  </p:cSld>
+  <p:clrMapOvr>
+    <a:masterClrMapping/>
+  </p:clrMapOvr>
+</p:sld>
+</file>
+
+<file path=ppt/slides/slide18.xml><?xml version="1.0" encoding="utf-8"?>
+<p:sld xmlns:a="http://schemas.openxmlformats.org/drawingml/2006/main" xmlns:r="http://schemas.openxmlformats.org/officeDocument/2006/relationships" xmlns:p="http://schemas.openxmlformats.org/presentationml/2006/main">
+  <p:cSld>
+    <p:spTree>
+      <p:nvGrpSpPr>
+        <p:cNvPr id="1" name=""/>
+        <p:cNvGrpSpPr/>
+        <p:nvPr/>
+      </p:nvGrpSpPr>
+      <p:grpSpPr>
+        <a:xfrm>
+          <a:off x="0" y="0"/>
+          <a:ext cx="0" cy="0"/>
+          <a:chOff x="0" y="0"/>
+          <a:chExt cx="0" cy="0"/>
+        </a:xfrm>
+      </p:grpSpPr>
+      <p:sp>
+        <p:nvSpPr>
+          <p:cNvPr id="2" name="文本框 1">
+            <a:extLst>
+              <a:ext uri="{FF2B5EF4-FFF2-40B4-BE49-F238E27FC236}">
+                <a16:creationId xmlns:a16="http://schemas.microsoft.com/office/drawing/2014/main" id="{D3EDDE71-5BA8-0390-6EF3-2497BD9DFB7B}"/>
+              </a:ext>
+            </a:extLst>
+          </p:cNvPr>
+          <p:cNvSpPr txBox="1"/>
+          <p:nvPr/>
+        </p:nvSpPr>
+        <p:spPr>
+          <a:xfrm>
+            <a:off x="912600" y="897058"/>
+            <a:ext cx="8240278" cy="584775"/>
+          </a:xfrm>
+          <a:prstGeom prst="rect">
+            <a:avLst/>
+          </a:prstGeom>
+          <a:noFill/>
+        </p:spPr>
+        <p:txBody>
+          <a:bodyPr wrap="square" rtlCol="0">
+            <a:spAutoFit/>
+          </a:bodyPr>
+          <a:lstStyle/>
+          <a:p>
+            <a:r>
+              <a:rPr lang="en-US" altLang="zh-CN" sz="3200" dirty="0">
+                <a:solidFill>
+                  <a:srgbClr val="92D050"/>
+                </a:solidFill>
+                <a:latin typeface="思源黑体 CN Heavy" panose="020B0A00000000000000" pitchFamily="34" charset="-122"/>
+                <a:ea typeface="思源黑体 CN Heavy" panose="020B0A00000000000000" pitchFamily="34" charset="-122"/>
+              </a:rPr>
+              <a:t>12</a:t>
+            </a:r>
+            <a:r>
+              <a:rPr lang="zh-CN" altLang="en-US" sz="3200" dirty="0">
+                <a:solidFill>
+                  <a:srgbClr val="92D050"/>
+                </a:solidFill>
+                <a:latin typeface="思源黑体 CN Heavy" panose="020B0A00000000000000" pitchFamily="34" charset="-122"/>
+                <a:ea typeface="思源黑体 CN Heavy" panose="020B0A00000000000000" pitchFamily="34" charset="-122"/>
+              </a:rPr>
+              <a:t>、数据管理类</a:t>
+            </a:r>
+          </a:p>
+        </p:txBody>
+      </p:sp>
+      <p:sp>
+        <p:nvSpPr>
+          <p:cNvPr id="3" name="文本框 2">
+            <a:extLst>
+              <a:ext uri="{FF2B5EF4-FFF2-40B4-BE49-F238E27FC236}">
+                <a16:creationId xmlns:a16="http://schemas.microsoft.com/office/drawing/2014/main" id="{1715D6D8-D3C1-21CA-B6D0-DD82627DF5EA}"/>
+              </a:ext>
+            </a:extLst>
+          </p:cNvPr>
+          <p:cNvSpPr txBox="1"/>
+          <p:nvPr/>
+        </p:nvSpPr>
+        <p:spPr>
+          <a:xfrm>
+            <a:off x="912600" y="2123657"/>
+            <a:ext cx="10956846" cy="523220"/>
+          </a:xfrm>
+          <a:prstGeom prst="rect">
+            <a:avLst/>
+          </a:prstGeom>
+          <a:noFill/>
+        </p:spPr>
+        <p:txBody>
+          <a:bodyPr wrap="square" rtlCol="0">
+            <a:spAutoFit/>
+          </a:bodyPr>
+          <a:lstStyle/>
+          <a:p>
+            <a:r>
+              <a:rPr lang="en-US" altLang="zh-CN" sz="2800" dirty="0">
+                <a:solidFill>
+                  <a:srgbClr val="FFC000"/>
+                </a:solidFill>
+                <a:latin typeface="思源黑体 CN Heavy" panose="020B0A00000000000000" pitchFamily="34" charset="-122"/>
+                <a:ea typeface="思源黑体 CN Heavy" panose="020B0A00000000000000" pitchFamily="34" charset="-122"/>
+              </a:rPr>
+              <a:t>Panel</a:t>
+            </a:r>
+            <a:r>
+              <a:rPr lang="zh-CN" altLang="en-US" sz="2800" dirty="0">
+                <a:solidFill>
+                  <a:srgbClr val="FFC000"/>
+                </a:solidFill>
+                <a:latin typeface="思源黑体 CN Heavy" panose="020B0A00000000000000" pitchFamily="34" charset="-122"/>
+                <a:ea typeface="思源黑体 CN Heavy" panose="020B0A00000000000000" pitchFamily="34" charset="-122"/>
+              </a:rPr>
+              <a:t>节点允许鼠标穿透</a:t>
+            </a:r>
+            <a:endParaRPr lang="en-US" altLang="zh-CN" sz="2800" dirty="0">
+              <a:solidFill>
+                <a:srgbClr val="FFC000"/>
+              </a:solidFill>
+              <a:latin typeface="思源黑体 CN Heavy" panose="020B0A00000000000000" pitchFamily="34" charset="-122"/>
+              <a:ea typeface="思源黑体 CN Heavy" panose="020B0A00000000000000" pitchFamily="34" charset="-122"/>
+            </a:endParaRPr>
+          </a:p>
+        </p:txBody>
+      </p:sp>
+    </p:spTree>
+    <p:extLst>
+      <p:ext uri="{BB962C8B-B14F-4D97-AF65-F5344CB8AC3E}">
+        <p14:creationId xmlns:p14="http://schemas.microsoft.com/office/powerpoint/2010/main" val="1733840735"/>
       </p:ext>
     </p:extLst>
   </p:cSld>
